--- a/Mapped Curriculum Lessons/Grade 6/Lesson 04 - Decisions/Decisions - Slides.pptx
+++ b/Mapped Curriculum Lessons/Grade 6/Lesson 04 - Decisions/Decisions - Slides.pptx
@@ -2,28 +2,28 @@
 <file path=ppt/presentation.xml><?xml version="1.0" encoding="utf-8"?>
 <p:presentation xmlns:p="http://schemas.openxmlformats.org/presentationml/2006/main" embedTrueTypeFonts="1" saveSubsetFonts="0">
   <p:sldMasterIdLst>
-    <p:sldMasterId xmlns:r="http://schemas.openxmlformats.org/officeDocument/2006/relationships" id="2147483648" r:id="R6f0767beba5e4271"/>
+    <p:sldMasterId xmlns:r="http://schemas.openxmlformats.org/officeDocument/2006/relationships" id="2147483648" r:id="R8e0a611128dd4170"/>
   </p:sldMasterIdLst>
   <p:notesMasterIdLst>
-    <p:notesMasterId xmlns:r="http://schemas.openxmlformats.org/officeDocument/2006/relationships" r:id="Rabd2671e7087415c"/>
+    <p:notesMasterId xmlns:r="http://schemas.openxmlformats.org/officeDocument/2006/relationships" r:id="R2cd36355edfc4e98"/>
   </p:notesMasterIdLst>
   <p:sldIdLst>
-    <p:sldId xmlns:r="http://schemas.openxmlformats.org/officeDocument/2006/relationships" id="256" r:id="R01f4737ae2624c80"/>
-    <p:sldId xmlns:r="http://schemas.openxmlformats.org/officeDocument/2006/relationships" id="257" r:id="R69205dffda7f4520"/>
-    <p:sldId xmlns:r="http://schemas.openxmlformats.org/officeDocument/2006/relationships" id="258" r:id="R6aa52d51b38646b1"/>
-    <p:sldId xmlns:r="http://schemas.openxmlformats.org/officeDocument/2006/relationships" id="259" r:id="Rf0f3f1b9bf5d43e0"/>
-    <p:sldId xmlns:r="http://schemas.openxmlformats.org/officeDocument/2006/relationships" id="260" r:id="R79d34bb72f224007"/>
-    <p:sldId xmlns:r="http://schemas.openxmlformats.org/officeDocument/2006/relationships" id="261" r:id="Rf9288499c16a4ec8"/>
-    <p:sldId xmlns:r="http://schemas.openxmlformats.org/officeDocument/2006/relationships" id="262" r:id="R8b0ec39a7c7c4131"/>
-    <p:sldId xmlns:r="http://schemas.openxmlformats.org/officeDocument/2006/relationships" id="263" r:id="R5a9a9afcc75a4924"/>
-    <p:sldId xmlns:r="http://schemas.openxmlformats.org/officeDocument/2006/relationships" id="264" r:id="R1d221ee18a2b48bd"/>
+    <p:sldId xmlns:r="http://schemas.openxmlformats.org/officeDocument/2006/relationships" id="256" r:id="R063b4f0ae0884387"/>
+    <p:sldId xmlns:r="http://schemas.openxmlformats.org/officeDocument/2006/relationships" id="257" r:id="R46d9ba7a2c914349"/>
+    <p:sldId xmlns:r="http://schemas.openxmlformats.org/officeDocument/2006/relationships" id="258" r:id="Rabe70907b70d41d1"/>
+    <p:sldId xmlns:r="http://schemas.openxmlformats.org/officeDocument/2006/relationships" id="259" r:id="Rf610d8af261048fa"/>
+    <p:sldId xmlns:r="http://schemas.openxmlformats.org/officeDocument/2006/relationships" id="260" r:id="R6d09999c69784ade"/>
+    <p:sldId xmlns:r="http://schemas.openxmlformats.org/officeDocument/2006/relationships" id="261" r:id="R8c0c796196e54325"/>
+    <p:sldId xmlns:r="http://schemas.openxmlformats.org/officeDocument/2006/relationships" id="262" r:id="R5b083e6aa6b74dda"/>
+    <p:sldId xmlns:r="http://schemas.openxmlformats.org/officeDocument/2006/relationships" id="263" r:id="R88b4d04f7f3946e4"/>
+    <p:sldId xmlns:r="http://schemas.openxmlformats.org/officeDocument/2006/relationships" id="264" r:id="R54e2f18ec5aa41cf"/>
   </p:sldIdLst>
   <p:sldSz cx="12192000" cy="6858000"/>
   <p:notesSz cx="6858000" cy="9144000"/>
   <p:embeddedFontLst>
     <p:embeddedFont>
       <p:font typeface="JetBrains Mono"/>
-      <p:regular xmlns:r="http://schemas.openxmlformats.org/officeDocument/2006/relationships" r:id="R503f5f466dd143c6"/>
+      <p:regular xmlns:r="http://schemas.openxmlformats.org/officeDocument/2006/relationships" r:id="R4abe71e928414777"/>
     </p:embeddedFont>
   </p:embeddedFontLst>
 </p:presentation>
@@ -1071,7 +1071,7 @@
           <p:nvPr/>
         </p:nvPicPr>
         <p:blipFill rotWithShape="1">
-          <a:blip xmlns:r="http://schemas.openxmlformats.org/officeDocument/2006/relationships" xmlns:a="http://schemas.openxmlformats.org/drawingml/2006/main" r:embed="Ree9a726ec5214463"/>
+          <a:blip xmlns:r="http://schemas.openxmlformats.org/officeDocument/2006/relationships" xmlns:a="http://schemas.openxmlformats.org/drawingml/2006/main" r:embed="R06f49d733be2410a"/>
           <a:stretch xmlns:a="http://schemas.openxmlformats.org/drawingml/2006/main"/>
         </p:blipFill>
         <p:spPr>
@@ -1451,7 +1451,7 @@
           <p:nvPr/>
         </p:nvPicPr>
         <p:blipFill rotWithShape="1">
-          <a:blip xmlns:r="http://schemas.openxmlformats.org/officeDocument/2006/relationships" xmlns:a="http://schemas.openxmlformats.org/drawingml/2006/main" r:embed="R4f469e15ffdb4aca">
+          <a:blip xmlns:r="http://schemas.openxmlformats.org/officeDocument/2006/relationships" xmlns:a="http://schemas.openxmlformats.org/drawingml/2006/main" r:embed="R5a957d2ae5754c1e">
             <a:alphaModFix amt="28000"/>
           </a:blip>
           <a:stretch xmlns:a="http://schemas.openxmlformats.org/drawingml/2006/main"/>
@@ -1664,7 +1664,7 @@
           <p:nvPr/>
         </p:nvPicPr>
         <p:blipFill rotWithShape="1">
-          <a:blip xmlns:r="http://schemas.openxmlformats.org/officeDocument/2006/relationships" xmlns:a="http://schemas.openxmlformats.org/drawingml/2006/main" r:embed="R0e861f0f783d4692">
+          <a:blip xmlns:r="http://schemas.openxmlformats.org/officeDocument/2006/relationships" xmlns:a="http://schemas.openxmlformats.org/drawingml/2006/main" r:embed="Rc3271f4edcaf48ab">
             <a:alphaModFix amt="28000"/>
           </a:blip>
           <a:stretch xmlns:a="http://schemas.openxmlformats.org/drawingml/2006/main"/>
@@ -1899,7 +1899,7 @@
           <p:nvPr/>
         </p:nvPicPr>
         <p:blipFill rotWithShape="1">
-          <a:blip xmlns:r="http://schemas.openxmlformats.org/officeDocument/2006/relationships" xmlns:a="http://schemas.openxmlformats.org/drawingml/2006/main" r:embed="Reecc23fec2ce428b">
+          <a:blip xmlns:r="http://schemas.openxmlformats.org/officeDocument/2006/relationships" xmlns:a="http://schemas.openxmlformats.org/drawingml/2006/main" r:embed="Rd3f2a1b0cf7a410e">
             <a:alphaModFix amt="28000"/>
           </a:blip>
           <a:stretch xmlns:a="http://schemas.openxmlformats.org/drawingml/2006/main"/>
@@ -2176,7 +2176,7 @@
           <p:nvPr/>
         </p:nvPicPr>
         <p:blipFill rotWithShape="1">
-          <a:blip xmlns:r="http://schemas.openxmlformats.org/officeDocument/2006/relationships" xmlns:a="http://schemas.openxmlformats.org/drawingml/2006/main" r:embed="Re067d53738204b10">
+          <a:blip xmlns:r="http://schemas.openxmlformats.org/officeDocument/2006/relationships" xmlns:a="http://schemas.openxmlformats.org/drawingml/2006/main" r:embed="R18bd8decb8fe4aff">
             <a:alphaModFix amt="28000"/>
           </a:blip>
           <a:stretch xmlns:a="http://schemas.openxmlformats.org/drawingml/2006/main"/>
@@ -2451,7 +2451,7 @@
           <p:nvPr/>
         </p:nvPicPr>
         <p:blipFill rotWithShape="1">
-          <a:blip xmlns:r="http://schemas.openxmlformats.org/officeDocument/2006/relationships" xmlns:a="http://schemas.openxmlformats.org/drawingml/2006/main" r:embed="Rfc4c58609e7147ee">
+          <a:blip xmlns:r="http://schemas.openxmlformats.org/officeDocument/2006/relationships" xmlns:a="http://schemas.openxmlformats.org/drawingml/2006/main" r:embed="R268a3eb8b54b41ac">
             <a:alphaModFix amt="28000"/>
           </a:blip>
           <a:stretch xmlns:a="http://schemas.openxmlformats.org/drawingml/2006/main"/>
@@ -2875,7 +2875,7 @@
           <p:nvPr/>
         </p:nvPicPr>
         <p:blipFill rotWithShape="1">
-          <a:blip xmlns:r="http://schemas.openxmlformats.org/officeDocument/2006/relationships" xmlns:a="http://schemas.openxmlformats.org/drawingml/2006/main" r:embed="R31cb2da0113e4260">
+          <a:blip xmlns:r="http://schemas.openxmlformats.org/officeDocument/2006/relationships" xmlns:a="http://schemas.openxmlformats.org/drawingml/2006/main" r:embed="Rec040692cc77466e">
             <a:alphaModFix amt="28000"/>
           </a:blip>
           <a:stretch xmlns:a="http://schemas.openxmlformats.org/drawingml/2006/main"/>
@@ -3016,7 +3016,7 @@
           <p:nvPr/>
         </p:nvPicPr>
         <p:blipFill rotWithShape="1">
-          <a:blip xmlns:r="http://schemas.openxmlformats.org/officeDocument/2006/relationships" xmlns:a="http://schemas.openxmlformats.org/drawingml/2006/main" r:embed="R0c593d76a03a4c4e">
+          <a:blip xmlns:r="http://schemas.openxmlformats.org/officeDocument/2006/relationships" xmlns:a="http://schemas.openxmlformats.org/drawingml/2006/main" r:embed="R5a00db0c56744454">
             <a:alphaModFix amt="28000"/>
           </a:blip>
           <a:stretch xmlns:a="http://schemas.openxmlformats.org/drawingml/2006/main"/>
@@ -3130,7 +3130,7 @@
           <p:nvPr/>
         </p:nvPicPr>
         <p:blipFill rotWithShape="1">
-          <a:blip xmlns:r="http://schemas.openxmlformats.org/officeDocument/2006/relationships" xmlns:a="http://schemas.openxmlformats.org/drawingml/2006/main" r:embed="Rb09ad847176d466f">
+          <a:blip xmlns:r="http://schemas.openxmlformats.org/officeDocument/2006/relationships" xmlns:a="http://schemas.openxmlformats.org/drawingml/2006/main" r:embed="R373b63b24d7847ef">
             <a:alphaModFix amt="28000"/>
           </a:blip>
           <a:stretch xmlns:a="http://schemas.openxmlformats.org/drawingml/2006/main"/>
@@ -3457,7 +3457,7 @@
           <p:nvPr/>
         </p:nvPicPr>
         <p:blipFill rotWithShape="1">
-          <a:blip xmlns:r="http://schemas.openxmlformats.org/officeDocument/2006/relationships" xmlns:a="http://schemas.openxmlformats.org/drawingml/2006/main" r:embed="R7d2e7d3d377d495e">
+          <a:blip xmlns:r="http://schemas.openxmlformats.org/officeDocument/2006/relationships" xmlns:a="http://schemas.openxmlformats.org/drawingml/2006/main" r:embed="R6b29be69e5994909">
             <a:alphaModFix amt="28000"/>
           </a:blip>
           <a:stretch xmlns:a="http://schemas.openxmlformats.org/drawingml/2006/main"/>
@@ -3745,7 +3745,7 @@
           <p:nvPr/>
         </p:nvPicPr>
         <p:blipFill rotWithShape="1">
-          <a:blip xmlns:r="http://schemas.openxmlformats.org/officeDocument/2006/relationships" xmlns:a="http://schemas.openxmlformats.org/drawingml/2006/main" r:embed="R8867243042ab4b5c">
+          <a:blip xmlns:r="http://schemas.openxmlformats.org/officeDocument/2006/relationships" xmlns:a="http://schemas.openxmlformats.org/drawingml/2006/main" r:embed="R7bbe82d0ba164e19">
             <a:alphaModFix amt="28000"/>
           </a:blip>
           <a:stretch xmlns:a="http://schemas.openxmlformats.org/drawingml/2006/main"/>
@@ -3982,17 +3982,17 @@
   </p:cSld>
   <p:clrMap bg1="lt1" tx1="dk1" bg2="lt2" tx2="dk2" accent1="accent1" accent2="accent2" accent3="accent3" accent4="accent4" accent5="accent5" accent6="accent6" hlink="hlink" folHlink="folHlink"/>
   <p:sldLayoutIdLst>
-    <p:sldLayoutId xmlns:r="http://schemas.openxmlformats.org/officeDocument/2006/relationships" id="2147483649" r:id="R17fc8541b63847dc"/>
-    <p:sldLayoutId xmlns:r="http://schemas.openxmlformats.org/officeDocument/2006/relationships" id="2147483650" r:id="R31d0c983fea0455f"/>
-    <p:sldLayoutId xmlns:r="http://schemas.openxmlformats.org/officeDocument/2006/relationships" id="2147483651" r:id="R377895bb3d4c41d4"/>
-    <p:sldLayoutId xmlns:r="http://schemas.openxmlformats.org/officeDocument/2006/relationships" id="2147483652" r:id="R7c6e67f248764391"/>
-    <p:sldLayoutId xmlns:r="http://schemas.openxmlformats.org/officeDocument/2006/relationships" id="2147483653" r:id="Rbd116ed7ff604873"/>
-    <p:sldLayoutId xmlns:r="http://schemas.openxmlformats.org/officeDocument/2006/relationships" id="2147483654" r:id="R95c7c019507147c4"/>
-    <p:sldLayoutId xmlns:r="http://schemas.openxmlformats.org/officeDocument/2006/relationships" id="2147483655" r:id="R5dfb270f5c35487c"/>
-    <p:sldLayoutId xmlns:r="http://schemas.openxmlformats.org/officeDocument/2006/relationships" id="2147483656" r:id="Rb096f10e0df2469d"/>
-    <p:sldLayoutId xmlns:r="http://schemas.openxmlformats.org/officeDocument/2006/relationships" id="2147483657" r:id="R1fc6bb467a9b42d6"/>
-    <p:sldLayoutId xmlns:r="http://schemas.openxmlformats.org/officeDocument/2006/relationships" id="2147483658" r:id="R27da47eab4a84171"/>
-    <p:sldLayoutId xmlns:r="http://schemas.openxmlformats.org/officeDocument/2006/relationships" id="2147483659" r:id="Rb3317495d0c449cc"/>
+    <p:sldLayoutId xmlns:r="http://schemas.openxmlformats.org/officeDocument/2006/relationships" id="2147483649" r:id="Rc39a9c72450245a0"/>
+    <p:sldLayoutId xmlns:r="http://schemas.openxmlformats.org/officeDocument/2006/relationships" id="2147483650" r:id="R0eaa84a6e03d43a9"/>
+    <p:sldLayoutId xmlns:r="http://schemas.openxmlformats.org/officeDocument/2006/relationships" id="2147483651" r:id="Rbc4bfc2412a745f9"/>
+    <p:sldLayoutId xmlns:r="http://schemas.openxmlformats.org/officeDocument/2006/relationships" id="2147483652" r:id="R183e89eec3164a8d"/>
+    <p:sldLayoutId xmlns:r="http://schemas.openxmlformats.org/officeDocument/2006/relationships" id="2147483653" r:id="R8af6c2e0ea1348d0"/>
+    <p:sldLayoutId xmlns:r="http://schemas.openxmlformats.org/officeDocument/2006/relationships" id="2147483654" r:id="R9caadd38a4cf478f"/>
+    <p:sldLayoutId xmlns:r="http://schemas.openxmlformats.org/officeDocument/2006/relationships" id="2147483655" r:id="R73b8801e2d374741"/>
+    <p:sldLayoutId xmlns:r="http://schemas.openxmlformats.org/officeDocument/2006/relationships" id="2147483656" r:id="Rf79b19a6f7644ab0"/>
+    <p:sldLayoutId xmlns:r="http://schemas.openxmlformats.org/officeDocument/2006/relationships" id="2147483657" r:id="R90714c02a23a4080"/>
+    <p:sldLayoutId xmlns:r="http://schemas.openxmlformats.org/officeDocument/2006/relationships" id="2147483658" r:id="Rf197317515b443ad"/>
+    <p:sldLayoutId xmlns:r="http://schemas.openxmlformats.org/officeDocument/2006/relationships" id="2147483659" r:id="Rc4a8c2066f4e4099"/>
   </p:sldLayoutIdLst>
   <p:hf hdr="0" ftr="0" dt="0"/>
   <p:txStyles>
@@ -7251,51 +7251,7 @@
                 <a:ea typeface="Calibri"/>
                 <a:cs typeface="Calibri"/>
               </a:rPr>
-              <a:t>Replace the </a:t>
-            </a:r>
-            <a:r>
-              <a:rPr sz="2400" b="0">
-                <a:solidFill>
-                  <a:srgbClr val="067D17"/>
-                </a:solidFill>
-                <a:latin typeface="JetBrains Mono"/>
-                <a:ea typeface="JetBrains Mono"/>
-                <a:cs typeface="JetBrains Mono"/>
-              </a:rPr>
-              <a:t>"walk"</a:t>
-            </a:r>
-            <a:r>
-              <a:rPr sz="2400" b="0">
-                <a:solidFill>
-                  <a:srgbClr val="080808"/>
-                </a:solidFill>
-                <a:latin typeface="Calibri"/>
-                <a:ea typeface="Calibri"/>
-                <a:cs typeface="Calibri"/>
-              </a:rPr>
-              <a:t> route with a </a:t>
-            </a:r>
-            <a:r>
-              <a:rPr sz="2400" b="0">
-                <a:solidFill>
-                  <a:srgbClr val="067D17"/>
-                </a:solidFill>
-                <a:latin typeface="JetBrains Mono"/>
-                <a:ea typeface="JetBrains Mono"/>
-                <a:cs typeface="JetBrains Mono"/>
-              </a:rPr>
-              <a:t>"cycle"</a:t>
-            </a:r>
-            <a:r>
-              <a:rPr sz="2400" b="0">
-                <a:solidFill>
-                  <a:srgbClr val="080808"/>
-                </a:solidFill>
-                <a:latin typeface="Calibri"/>
-                <a:ea typeface="Calibri"/>
-                <a:cs typeface="Calibri"/>
-              </a:rPr>
-              <a:t> route. Update the prompt, the if comparison and its message so </a:t>
+              <a:t>Replace the walk route with a cycle route. Update the prompt, the if comparison and its message so </a:t>
             </a:r>
             <a:r>
               <a:rPr sz="2400" b="0">
@@ -8807,29 +8763,7 @@
                 <a:ea typeface="Calibri"/>
                 <a:cs typeface="Calibri"/>
               </a:rPr>
-              <a:t> to build a two-way choice: </a:t>
-            </a:r>
-            <a:r>
-              <a:rPr sz="2400" b="0">
-                <a:solidFill>
-                  <a:srgbClr val="067D17"/>
-                </a:solidFill>
-                <a:latin typeface="JetBrains Mono"/>
-                <a:ea typeface="JetBrains Mono"/>
-                <a:cs typeface="JetBrains Mono"/>
-              </a:rPr>
-              <a:t>"yes"</a:t>
-            </a:r>
-            <a:r>
-              <a:rPr sz="2400" b="0">
-                <a:solidFill>
-                  <a:srgbClr val="080808"/>
-                </a:solidFill>
-                <a:latin typeface="Calibri"/>
-                <a:ea typeface="Calibri"/>
-                <a:cs typeface="Calibri"/>
-              </a:rPr>
-              <a:t> displays </a:t>
+              <a:t> to build a two-way choice: yes displays </a:t>
             </a:r>
             <a:r>
               <a:rPr sz="2400" b="0">

--- a/Mapped Curriculum Lessons/Grade 6/Lesson 04 - Decisions/Decisions - Slides.pptx
+++ b/Mapped Curriculum Lessons/Grade 6/Lesson 04 - Decisions/Decisions - Slides.pptx
@@ -2,28 +2,28 @@
 <file path=ppt/presentation.xml><?xml version="1.0" encoding="utf-8"?>
 <p:presentation xmlns:p="http://schemas.openxmlformats.org/presentationml/2006/main" embedTrueTypeFonts="1" saveSubsetFonts="0">
   <p:sldMasterIdLst>
-    <p:sldMasterId xmlns:r="http://schemas.openxmlformats.org/officeDocument/2006/relationships" id="2147483648" r:id="R8e0a611128dd4170"/>
+    <p:sldMasterId xmlns:r="http://schemas.openxmlformats.org/officeDocument/2006/relationships" id="2147483648" r:id="R2d2169a4ba184157"/>
   </p:sldMasterIdLst>
   <p:notesMasterIdLst>
-    <p:notesMasterId xmlns:r="http://schemas.openxmlformats.org/officeDocument/2006/relationships" r:id="R2cd36355edfc4e98"/>
+    <p:notesMasterId xmlns:r="http://schemas.openxmlformats.org/officeDocument/2006/relationships" r:id="Rbd6a24eba3d24b74"/>
   </p:notesMasterIdLst>
   <p:sldIdLst>
-    <p:sldId xmlns:r="http://schemas.openxmlformats.org/officeDocument/2006/relationships" id="256" r:id="R063b4f0ae0884387"/>
-    <p:sldId xmlns:r="http://schemas.openxmlformats.org/officeDocument/2006/relationships" id="257" r:id="R46d9ba7a2c914349"/>
-    <p:sldId xmlns:r="http://schemas.openxmlformats.org/officeDocument/2006/relationships" id="258" r:id="Rabe70907b70d41d1"/>
-    <p:sldId xmlns:r="http://schemas.openxmlformats.org/officeDocument/2006/relationships" id="259" r:id="Rf610d8af261048fa"/>
-    <p:sldId xmlns:r="http://schemas.openxmlformats.org/officeDocument/2006/relationships" id="260" r:id="R6d09999c69784ade"/>
-    <p:sldId xmlns:r="http://schemas.openxmlformats.org/officeDocument/2006/relationships" id="261" r:id="R8c0c796196e54325"/>
-    <p:sldId xmlns:r="http://schemas.openxmlformats.org/officeDocument/2006/relationships" id="262" r:id="R5b083e6aa6b74dda"/>
-    <p:sldId xmlns:r="http://schemas.openxmlformats.org/officeDocument/2006/relationships" id="263" r:id="R88b4d04f7f3946e4"/>
-    <p:sldId xmlns:r="http://schemas.openxmlformats.org/officeDocument/2006/relationships" id="264" r:id="R54e2f18ec5aa41cf"/>
+    <p:sldId xmlns:r="http://schemas.openxmlformats.org/officeDocument/2006/relationships" id="256" r:id="R393b67ce76a94f9c"/>
+    <p:sldId xmlns:r="http://schemas.openxmlformats.org/officeDocument/2006/relationships" id="257" r:id="R90159627a1804b60"/>
+    <p:sldId xmlns:r="http://schemas.openxmlformats.org/officeDocument/2006/relationships" id="258" r:id="Ra15482000c104cdd"/>
+    <p:sldId xmlns:r="http://schemas.openxmlformats.org/officeDocument/2006/relationships" id="259" r:id="R9d6a02dd846244ff"/>
+    <p:sldId xmlns:r="http://schemas.openxmlformats.org/officeDocument/2006/relationships" id="260" r:id="R0b0371e4e1564d84"/>
+    <p:sldId xmlns:r="http://schemas.openxmlformats.org/officeDocument/2006/relationships" id="261" r:id="Re8a8cceb84074260"/>
+    <p:sldId xmlns:r="http://schemas.openxmlformats.org/officeDocument/2006/relationships" id="262" r:id="Rc78bd60a06204e5a"/>
+    <p:sldId xmlns:r="http://schemas.openxmlformats.org/officeDocument/2006/relationships" id="263" r:id="R73dfcf4d0a9147d6"/>
+    <p:sldId xmlns:r="http://schemas.openxmlformats.org/officeDocument/2006/relationships" id="264" r:id="R0b584f9742e643d1"/>
   </p:sldIdLst>
   <p:sldSz cx="12192000" cy="6858000"/>
   <p:notesSz cx="6858000" cy="9144000"/>
   <p:embeddedFontLst>
     <p:embeddedFont>
       <p:font typeface="JetBrains Mono"/>
-      <p:regular xmlns:r="http://schemas.openxmlformats.org/officeDocument/2006/relationships" r:id="R4abe71e928414777"/>
+      <p:regular xmlns:r="http://schemas.openxmlformats.org/officeDocument/2006/relationships" r:id="R3e99000227d94082"/>
     </p:embeddedFont>
   </p:embeddedFontLst>
 </p:presentation>
@@ -1071,7 +1071,7 @@
           <p:nvPr/>
         </p:nvPicPr>
         <p:blipFill rotWithShape="1">
-          <a:blip xmlns:r="http://schemas.openxmlformats.org/officeDocument/2006/relationships" xmlns:a="http://schemas.openxmlformats.org/drawingml/2006/main" r:embed="R06f49d733be2410a"/>
+          <a:blip xmlns:r="http://schemas.openxmlformats.org/officeDocument/2006/relationships" xmlns:a="http://schemas.openxmlformats.org/drawingml/2006/main" r:embed="R22a1479f7d7e4d81"/>
           <a:stretch xmlns:a="http://schemas.openxmlformats.org/drawingml/2006/main"/>
         </p:blipFill>
         <p:spPr>
@@ -1451,7 +1451,7 @@
           <p:nvPr/>
         </p:nvPicPr>
         <p:blipFill rotWithShape="1">
-          <a:blip xmlns:r="http://schemas.openxmlformats.org/officeDocument/2006/relationships" xmlns:a="http://schemas.openxmlformats.org/drawingml/2006/main" r:embed="R5a957d2ae5754c1e">
+          <a:blip xmlns:r="http://schemas.openxmlformats.org/officeDocument/2006/relationships" xmlns:a="http://schemas.openxmlformats.org/drawingml/2006/main" r:embed="Red44a44fb3194469">
             <a:alphaModFix amt="28000"/>
           </a:blip>
           <a:stretch xmlns:a="http://schemas.openxmlformats.org/drawingml/2006/main"/>
@@ -1664,7 +1664,7 @@
           <p:nvPr/>
         </p:nvPicPr>
         <p:blipFill rotWithShape="1">
-          <a:blip xmlns:r="http://schemas.openxmlformats.org/officeDocument/2006/relationships" xmlns:a="http://schemas.openxmlformats.org/drawingml/2006/main" r:embed="Rc3271f4edcaf48ab">
+          <a:blip xmlns:r="http://schemas.openxmlformats.org/officeDocument/2006/relationships" xmlns:a="http://schemas.openxmlformats.org/drawingml/2006/main" r:embed="R5148d84cbc244196">
             <a:alphaModFix amt="28000"/>
           </a:blip>
           <a:stretch xmlns:a="http://schemas.openxmlformats.org/drawingml/2006/main"/>
@@ -1899,7 +1899,7 @@
           <p:nvPr/>
         </p:nvPicPr>
         <p:blipFill rotWithShape="1">
-          <a:blip xmlns:r="http://schemas.openxmlformats.org/officeDocument/2006/relationships" xmlns:a="http://schemas.openxmlformats.org/drawingml/2006/main" r:embed="Rd3f2a1b0cf7a410e">
+          <a:blip xmlns:r="http://schemas.openxmlformats.org/officeDocument/2006/relationships" xmlns:a="http://schemas.openxmlformats.org/drawingml/2006/main" r:embed="R2ebacfe9a6dc4b18">
             <a:alphaModFix amt="28000"/>
           </a:blip>
           <a:stretch xmlns:a="http://schemas.openxmlformats.org/drawingml/2006/main"/>
@@ -2176,7 +2176,7 @@
           <p:nvPr/>
         </p:nvPicPr>
         <p:blipFill rotWithShape="1">
-          <a:blip xmlns:r="http://schemas.openxmlformats.org/officeDocument/2006/relationships" xmlns:a="http://schemas.openxmlformats.org/drawingml/2006/main" r:embed="R18bd8decb8fe4aff">
+          <a:blip xmlns:r="http://schemas.openxmlformats.org/officeDocument/2006/relationships" xmlns:a="http://schemas.openxmlformats.org/drawingml/2006/main" r:embed="R5838127b7a394f21">
             <a:alphaModFix amt="28000"/>
           </a:blip>
           <a:stretch xmlns:a="http://schemas.openxmlformats.org/drawingml/2006/main"/>
@@ -2451,7 +2451,7 @@
           <p:nvPr/>
         </p:nvPicPr>
         <p:blipFill rotWithShape="1">
-          <a:blip xmlns:r="http://schemas.openxmlformats.org/officeDocument/2006/relationships" xmlns:a="http://schemas.openxmlformats.org/drawingml/2006/main" r:embed="R268a3eb8b54b41ac">
+          <a:blip xmlns:r="http://schemas.openxmlformats.org/officeDocument/2006/relationships" xmlns:a="http://schemas.openxmlformats.org/drawingml/2006/main" r:embed="Rcb3c116ee8524577">
             <a:alphaModFix amt="28000"/>
           </a:blip>
           <a:stretch xmlns:a="http://schemas.openxmlformats.org/drawingml/2006/main"/>
@@ -2875,7 +2875,7 @@
           <p:nvPr/>
         </p:nvPicPr>
         <p:blipFill rotWithShape="1">
-          <a:blip xmlns:r="http://schemas.openxmlformats.org/officeDocument/2006/relationships" xmlns:a="http://schemas.openxmlformats.org/drawingml/2006/main" r:embed="Rec040692cc77466e">
+          <a:blip xmlns:r="http://schemas.openxmlformats.org/officeDocument/2006/relationships" xmlns:a="http://schemas.openxmlformats.org/drawingml/2006/main" r:embed="R276fed3b1ba94549">
             <a:alphaModFix amt="28000"/>
           </a:blip>
           <a:stretch xmlns:a="http://schemas.openxmlformats.org/drawingml/2006/main"/>
@@ -3016,7 +3016,7 @@
           <p:nvPr/>
         </p:nvPicPr>
         <p:blipFill rotWithShape="1">
-          <a:blip xmlns:r="http://schemas.openxmlformats.org/officeDocument/2006/relationships" xmlns:a="http://schemas.openxmlformats.org/drawingml/2006/main" r:embed="R5a00db0c56744454">
+          <a:blip xmlns:r="http://schemas.openxmlformats.org/officeDocument/2006/relationships" xmlns:a="http://schemas.openxmlformats.org/drawingml/2006/main" r:embed="Rf435a44f3d43476c">
             <a:alphaModFix amt="28000"/>
           </a:blip>
           <a:stretch xmlns:a="http://schemas.openxmlformats.org/drawingml/2006/main"/>
@@ -3130,7 +3130,7 @@
           <p:nvPr/>
         </p:nvPicPr>
         <p:blipFill rotWithShape="1">
-          <a:blip xmlns:r="http://schemas.openxmlformats.org/officeDocument/2006/relationships" xmlns:a="http://schemas.openxmlformats.org/drawingml/2006/main" r:embed="R373b63b24d7847ef">
+          <a:blip xmlns:r="http://schemas.openxmlformats.org/officeDocument/2006/relationships" xmlns:a="http://schemas.openxmlformats.org/drawingml/2006/main" r:embed="Rd06b252bc8b84ef3">
             <a:alphaModFix amt="28000"/>
           </a:blip>
           <a:stretch xmlns:a="http://schemas.openxmlformats.org/drawingml/2006/main"/>
@@ -3457,7 +3457,7 @@
           <p:nvPr/>
         </p:nvPicPr>
         <p:blipFill rotWithShape="1">
-          <a:blip xmlns:r="http://schemas.openxmlformats.org/officeDocument/2006/relationships" xmlns:a="http://schemas.openxmlformats.org/drawingml/2006/main" r:embed="R6b29be69e5994909">
+          <a:blip xmlns:r="http://schemas.openxmlformats.org/officeDocument/2006/relationships" xmlns:a="http://schemas.openxmlformats.org/drawingml/2006/main" r:embed="R9e34282b6b7e4276">
             <a:alphaModFix amt="28000"/>
           </a:blip>
           <a:stretch xmlns:a="http://schemas.openxmlformats.org/drawingml/2006/main"/>
@@ -3745,7 +3745,7 @@
           <p:nvPr/>
         </p:nvPicPr>
         <p:blipFill rotWithShape="1">
-          <a:blip xmlns:r="http://schemas.openxmlformats.org/officeDocument/2006/relationships" xmlns:a="http://schemas.openxmlformats.org/drawingml/2006/main" r:embed="R7bbe82d0ba164e19">
+          <a:blip xmlns:r="http://schemas.openxmlformats.org/officeDocument/2006/relationships" xmlns:a="http://schemas.openxmlformats.org/drawingml/2006/main" r:embed="R1e8146b7e54e4004">
             <a:alphaModFix amt="28000"/>
           </a:blip>
           <a:stretch xmlns:a="http://schemas.openxmlformats.org/drawingml/2006/main"/>
@@ -3982,17 +3982,17 @@
   </p:cSld>
   <p:clrMap bg1="lt1" tx1="dk1" bg2="lt2" tx2="dk2" accent1="accent1" accent2="accent2" accent3="accent3" accent4="accent4" accent5="accent5" accent6="accent6" hlink="hlink" folHlink="folHlink"/>
   <p:sldLayoutIdLst>
-    <p:sldLayoutId xmlns:r="http://schemas.openxmlformats.org/officeDocument/2006/relationships" id="2147483649" r:id="Rc39a9c72450245a0"/>
-    <p:sldLayoutId xmlns:r="http://schemas.openxmlformats.org/officeDocument/2006/relationships" id="2147483650" r:id="R0eaa84a6e03d43a9"/>
-    <p:sldLayoutId xmlns:r="http://schemas.openxmlformats.org/officeDocument/2006/relationships" id="2147483651" r:id="Rbc4bfc2412a745f9"/>
-    <p:sldLayoutId xmlns:r="http://schemas.openxmlformats.org/officeDocument/2006/relationships" id="2147483652" r:id="R183e89eec3164a8d"/>
-    <p:sldLayoutId xmlns:r="http://schemas.openxmlformats.org/officeDocument/2006/relationships" id="2147483653" r:id="R8af6c2e0ea1348d0"/>
-    <p:sldLayoutId xmlns:r="http://schemas.openxmlformats.org/officeDocument/2006/relationships" id="2147483654" r:id="R9caadd38a4cf478f"/>
-    <p:sldLayoutId xmlns:r="http://schemas.openxmlformats.org/officeDocument/2006/relationships" id="2147483655" r:id="R73b8801e2d374741"/>
-    <p:sldLayoutId xmlns:r="http://schemas.openxmlformats.org/officeDocument/2006/relationships" id="2147483656" r:id="Rf79b19a6f7644ab0"/>
-    <p:sldLayoutId xmlns:r="http://schemas.openxmlformats.org/officeDocument/2006/relationships" id="2147483657" r:id="R90714c02a23a4080"/>
-    <p:sldLayoutId xmlns:r="http://schemas.openxmlformats.org/officeDocument/2006/relationships" id="2147483658" r:id="Rf197317515b443ad"/>
-    <p:sldLayoutId xmlns:r="http://schemas.openxmlformats.org/officeDocument/2006/relationships" id="2147483659" r:id="Rc4a8c2066f4e4099"/>
+    <p:sldLayoutId xmlns:r="http://schemas.openxmlformats.org/officeDocument/2006/relationships" id="2147483649" r:id="Re46b3c7b596d43bd"/>
+    <p:sldLayoutId xmlns:r="http://schemas.openxmlformats.org/officeDocument/2006/relationships" id="2147483650" r:id="R2097e76a7621407f"/>
+    <p:sldLayoutId xmlns:r="http://schemas.openxmlformats.org/officeDocument/2006/relationships" id="2147483651" r:id="R4f9f18fdd2e74ef7"/>
+    <p:sldLayoutId xmlns:r="http://schemas.openxmlformats.org/officeDocument/2006/relationships" id="2147483652" r:id="R78d6fb53817d431f"/>
+    <p:sldLayoutId xmlns:r="http://schemas.openxmlformats.org/officeDocument/2006/relationships" id="2147483653" r:id="Ra0665b770c9d4272"/>
+    <p:sldLayoutId xmlns:r="http://schemas.openxmlformats.org/officeDocument/2006/relationships" id="2147483654" r:id="R491da08793cd41c8"/>
+    <p:sldLayoutId xmlns:r="http://schemas.openxmlformats.org/officeDocument/2006/relationships" id="2147483655" r:id="R433f23921cfe4a1a"/>
+    <p:sldLayoutId xmlns:r="http://schemas.openxmlformats.org/officeDocument/2006/relationships" id="2147483656" r:id="R844c44ba63db4e03"/>
+    <p:sldLayoutId xmlns:r="http://schemas.openxmlformats.org/officeDocument/2006/relationships" id="2147483657" r:id="R755bdceb85e54dec"/>
+    <p:sldLayoutId xmlns:r="http://schemas.openxmlformats.org/officeDocument/2006/relationships" id="2147483658" r:id="Raff1d9a0ac2c4df2"/>
+    <p:sldLayoutId xmlns:r="http://schemas.openxmlformats.org/officeDocument/2006/relationships" id="2147483659" r:id="Rd1f90bc536f240a7"/>
   </p:sldLayoutIdLst>
   <p:hf hdr="0" ftr="0" dt="0"/>
   <p:txStyles>
@@ -7232,7 +7232,7 @@
         </p:spPr>
         <p:txBody>
           <a:bodyPr xmlns:a="http://schemas.openxmlformats.org/drawingml/2006/main">
-            <a:normAutofit fontScale="100000"/>
+            <a:normAutofit fontScale="91261"/>
           </a:bodyPr>
           <a:lstStyle xmlns:a="http://schemas.openxmlformats.org/drawingml/2006/main"/>
           <a:p xmlns:a="http://schemas.openxmlformats.org/drawingml/2006/main">
@@ -7251,7 +7251,7 @@
                 <a:ea typeface="Calibri"/>
                 <a:cs typeface="Calibri"/>
               </a:rPr>
-              <a:t>Replace the walk route with a cycle route. Update the prompt, the if comparison and its message so </a:t>
+              <a:t>Change the first choice from </a:t>
             </a:r>
             <a:r>
               <a:rPr sz="2400" b="0">
@@ -7262,7 +7262,7 @@
                 <a:ea typeface="JetBrains Mono"/>
                 <a:cs typeface="JetBrains Mono"/>
               </a:rPr>
-              <a:t>"cycle"</a:t>
+              <a:t>"walk"</a:t>
             </a:r>
             <a:r>
               <a:rPr sz="2400" b="0">
@@ -7273,7 +7273,7 @@
                 <a:ea typeface="Calibri"/>
                 <a:cs typeface="Calibri"/>
               </a:rPr>
-              <a:t> displays </a:t>
+              <a:t> to </a:t>
             </a:r>
             <a:r>
               <a:rPr sz="2400" b="0">
@@ -7284,7 +7284,7 @@
                 <a:ea typeface="JetBrains Mono"/>
                 <a:cs typeface="JetBrains Mono"/>
               </a:rPr>
-              <a:t>"Ride a bike in the park."</a:t>
+              <a:t>"cycle"</a:t>
             </a:r>
             <a:r>
               <a:rPr sz="2400" b="0">
@@ -7295,7 +7295,7 @@
                 <a:ea typeface="Calibri"/>
                 <a:cs typeface="Calibri"/>
               </a:rPr>
-              <a:t> Keep the </a:t>
+              <a:t>. Update the input message, the </a:t>
             </a:r>
             <a:r>
               <a:rPr sz="2400" b="0">
@@ -7306,7 +7306,7 @@
                 <a:ea typeface="JetBrains Mono"/>
                 <a:cs typeface="JetBrains Mono"/>
               </a:rPr>
-              <a:t>else</a:t>
+              <a:t>if</a:t>
             </a:r>
             <a:r>
               <a:rPr sz="2400" b="0">
@@ -7317,7 +7317,7 @@
                 <a:ea typeface="Calibri"/>
                 <a:cs typeface="Calibri"/>
               </a:rPr>
-              <a:t> route unchanged. Test </a:t>
+              <a:t> comparison and its output so </a:t>
             </a:r>
             <a:r>
               <a:rPr sz="2400" b="0">
@@ -7339,7 +7339,7 @@
                 <a:ea typeface="Calibri"/>
                 <a:cs typeface="Calibri"/>
               </a:rPr>
-              <a:t> and </a:t>
+              <a:t> displays </a:t>
             </a:r>
             <a:r>
               <a:rPr sz="2400" b="0">
@@ -7350,7 +7350,7 @@
                 <a:ea typeface="JetBrains Mono"/>
                 <a:cs typeface="JetBrains Mono"/>
               </a:rPr>
-              <a:t>"read"</a:t>
+              <a:t>"Ride a bike in the park."</a:t>
             </a:r>
             <a:r>
               <a:rPr sz="2400" b="0">
@@ -7361,7 +7361,106 @@
                 <a:ea typeface="Calibri"/>
                 <a:cs typeface="Calibri"/>
               </a:rPr>
-              <a:t>.</a:t>
+              <a:t> Keep the </a:t>
+            </a:r>
+            <a:r>
+              <a:rPr sz="2400" b="0">
+                <a:solidFill>
+                  <a:srgbClr val="067D17"/>
+                </a:solidFill>
+                <a:latin typeface="JetBrains Mono"/>
+                <a:ea typeface="JetBrains Mono"/>
+                <a:cs typeface="JetBrains Mono"/>
+              </a:rPr>
+              <a:t>"read"</a:t>
+            </a:r>
+            <a:r>
+              <a:rPr sz="2400" b="0">
+                <a:solidFill>
+                  <a:srgbClr val="080808"/>
+                </a:solidFill>
+                <a:latin typeface="Calibri"/>
+                <a:ea typeface="Calibri"/>
+                <a:cs typeface="Calibri"/>
+              </a:rPr>
+              <a:t> choice and its output unchanged. Test </a:t>
+            </a:r>
+            <a:r>
+              <a:rPr sz="2400" b="0">
+                <a:solidFill>
+                  <a:srgbClr val="067D17"/>
+                </a:solidFill>
+                <a:latin typeface="JetBrains Mono"/>
+                <a:ea typeface="JetBrains Mono"/>
+                <a:cs typeface="JetBrains Mono"/>
+              </a:rPr>
+              <a:t>"cycle"</a:t>
+            </a:r>
+            <a:r>
+              <a:rPr sz="2400" b="0">
+                <a:solidFill>
+                  <a:srgbClr val="080808"/>
+                </a:solidFill>
+                <a:latin typeface="Calibri"/>
+                <a:ea typeface="Calibri"/>
+                <a:cs typeface="Calibri"/>
+              </a:rPr>
+              <a:t>; display </a:t>
+            </a:r>
+            <a:r>
+              <a:rPr sz="2400" b="0">
+                <a:solidFill>
+                  <a:srgbClr val="067D17"/>
+                </a:solidFill>
+                <a:latin typeface="JetBrains Mono"/>
+                <a:ea typeface="JetBrains Mono"/>
+                <a:cs typeface="JetBrains Mono"/>
+              </a:rPr>
+              <a:t>"Ride a bike in the park."</a:t>
+            </a:r>
+            <a:r>
+              <a:rPr sz="2400" b="0">
+                <a:solidFill>
+                  <a:srgbClr val="080808"/>
+                </a:solidFill>
+                <a:latin typeface="Calibri"/>
+                <a:ea typeface="Calibri"/>
+                <a:cs typeface="Calibri"/>
+              </a:rPr>
+              <a:t> Test </a:t>
+            </a:r>
+            <a:r>
+              <a:rPr sz="2400" b="0">
+                <a:solidFill>
+                  <a:srgbClr val="067D17"/>
+                </a:solidFill>
+                <a:latin typeface="JetBrains Mono"/>
+                <a:ea typeface="JetBrains Mono"/>
+                <a:cs typeface="JetBrains Mono"/>
+              </a:rPr>
+              <a:t>"read"</a:t>
+            </a:r>
+            <a:r>
+              <a:rPr sz="2400" b="0">
+                <a:solidFill>
+                  <a:srgbClr val="080808"/>
+                </a:solidFill>
+                <a:latin typeface="Calibri"/>
+                <a:ea typeface="Calibri"/>
+                <a:cs typeface="Calibri"/>
+              </a:rPr>
+              <a:t>; display </a:t>
+            </a:r>
+            <a:r>
+              <a:rPr sz="2400" b="0">
+                <a:solidFill>
+                  <a:srgbClr val="067D17"/>
+                </a:solidFill>
+                <a:latin typeface="JetBrains Mono"/>
+                <a:ea typeface="JetBrains Mono"/>
+                <a:cs typeface="JetBrains Mono"/>
+              </a:rPr>
+              <a:t>"Read a book at home."</a:t>
             </a:r>
           </a:p>
         </p:txBody>
@@ -8029,7 +8128,172 @@
                 <a:ea typeface="Calibri"/>
                 <a:cs typeface="Calibri"/>
               </a:rPr>
-              <a:t>Personalise both routes: ask for the user's name, then include it in whichever recommendation appears. Check that the name is shown for both possible choices.</a:t>
+              <a:t>Start with your Challenge 1 program. Ask for the user's name and store it in [name] before asking for </a:t>
+            </a:r>
+            <a:r>
+              <a:rPr sz="2400" b="0">
+                <a:solidFill>
+                  <a:srgbClr val="067D17"/>
+                </a:solidFill>
+                <a:latin typeface="JetBrains Mono"/>
+                <a:ea typeface="JetBrains Mono"/>
+                <a:cs typeface="JetBrains Mono"/>
+              </a:rPr>
+              <a:t>"cycle"</a:t>
+            </a:r>
+            <a:r>
+              <a:rPr sz="2400" b="0">
+                <a:solidFill>
+                  <a:srgbClr val="080808"/>
+                </a:solidFill>
+                <a:latin typeface="Calibri"/>
+                <a:ea typeface="Calibri"/>
+                <a:cs typeface="Calibri"/>
+              </a:rPr>
+              <a:t> or </a:t>
+            </a:r>
+            <a:r>
+              <a:rPr sz="2400" b="0">
+                <a:solidFill>
+                  <a:srgbClr val="067D17"/>
+                </a:solidFill>
+                <a:latin typeface="JetBrains Mono"/>
+                <a:ea typeface="JetBrains Mono"/>
+                <a:cs typeface="JetBrains Mono"/>
+              </a:rPr>
+              <a:t>"read"</a:t>
+            </a:r>
+            <a:r>
+              <a:rPr sz="2400" b="0">
+                <a:solidFill>
+                  <a:srgbClr val="080808"/>
+                </a:solidFill>
+                <a:latin typeface="Calibri"/>
+                <a:ea typeface="Calibri"/>
+                <a:cs typeface="Calibri"/>
+              </a:rPr>
+              <a:t>. Include [name] in both outputs. Test </a:t>
+            </a:r>
+            <a:r>
+              <a:rPr sz="2400" b="0">
+                <a:solidFill>
+                  <a:srgbClr val="067D17"/>
+                </a:solidFill>
+                <a:latin typeface="JetBrains Mono"/>
+                <a:ea typeface="JetBrains Mono"/>
+                <a:cs typeface="JetBrains Mono"/>
+              </a:rPr>
+              <a:t>"Sam"</a:t>
+            </a:r>
+            <a:r>
+              <a:rPr sz="2400" b="0">
+                <a:solidFill>
+                  <a:srgbClr val="080808"/>
+                </a:solidFill>
+                <a:latin typeface="Calibri"/>
+                <a:ea typeface="Calibri"/>
+                <a:cs typeface="Calibri"/>
+              </a:rPr>
+              <a:t> and </a:t>
+            </a:r>
+            <a:r>
+              <a:rPr sz="2400" b="0">
+                <a:solidFill>
+                  <a:srgbClr val="067D17"/>
+                </a:solidFill>
+                <a:latin typeface="JetBrains Mono"/>
+                <a:ea typeface="JetBrains Mono"/>
+                <a:cs typeface="JetBrains Mono"/>
+              </a:rPr>
+              <a:t>"cycle"</a:t>
+            </a:r>
+            <a:r>
+              <a:rPr sz="2400" b="0">
+                <a:solidFill>
+                  <a:srgbClr val="080808"/>
+                </a:solidFill>
+                <a:latin typeface="Calibri"/>
+                <a:ea typeface="Calibri"/>
+                <a:cs typeface="Calibri"/>
+              </a:rPr>
+              <a:t>; display </a:t>
+            </a:r>
+            <a:r>
+              <a:rPr sz="2400" b="0">
+                <a:solidFill>
+                  <a:srgbClr val="067D17"/>
+                </a:solidFill>
+                <a:latin typeface="JetBrains Mono"/>
+                <a:ea typeface="JetBrains Mono"/>
+                <a:cs typeface="JetBrains Mono"/>
+              </a:rPr>
+              <a:t>"Sam rides a bike in the park."</a:t>
+            </a:r>
+            <a:r>
+              <a:rPr sz="2400" b="0">
+                <a:solidFill>
+                  <a:srgbClr val="080808"/>
+                </a:solidFill>
+                <a:latin typeface="Calibri"/>
+                <a:ea typeface="Calibri"/>
+                <a:cs typeface="Calibri"/>
+              </a:rPr>
+              <a:t> Test </a:t>
+            </a:r>
+            <a:r>
+              <a:rPr sz="2400" b="0">
+                <a:solidFill>
+                  <a:srgbClr val="067D17"/>
+                </a:solidFill>
+                <a:latin typeface="JetBrains Mono"/>
+                <a:ea typeface="JetBrains Mono"/>
+                <a:cs typeface="JetBrains Mono"/>
+              </a:rPr>
+              <a:t>"Sam"</a:t>
+            </a:r>
+            <a:r>
+              <a:rPr sz="2400" b="0">
+                <a:solidFill>
+                  <a:srgbClr val="080808"/>
+                </a:solidFill>
+                <a:latin typeface="Calibri"/>
+                <a:ea typeface="Calibri"/>
+                <a:cs typeface="Calibri"/>
+              </a:rPr>
+              <a:t> and </a:t>
+            </a:r>
+            <a:r>
+              <a:rPr sz="2400" b="0">
+                <a:solidFill>
+                  <a:srgbClr val="067D17"/>
+                </a:solidFill>
+                <a:latin typeface="JetBrains Mono"/>
+                <a:ea typeface="JetBrains Mono"/>
+                <a:cs typeface="JetBrains Mono"/>
+              </a:rPr>
+              <a:t>"read"</a:t>
+            </a:r>
+            <a:r>
+              <a:rPr sz="2400" b="0">
+                <a:solidFill>
+                  <a:srgbClr val="080808"/>
+                </a:solidFill>
+                <a:latin typeface="Calibri"/>
+                <a:ea typeface="Calibri"/>
+                <a:cs typeface="Calibri"/>
+              </a:rPr>
+              <a:t>; display </a:t>
+            </a:r>
+            <a:r>
+              <a:rPr sz="2400" b="0">
+                <a:solidFill>
+                  <a:srgbClr val="067D17"/>
+                </a:solidFill>
+                <a:latin typeface="JetBrains Mono"/>
+                <a:ea typeface="JetBrains Mono"/>
+                <a:cs typeface="JetBrains Mono"/>
+              </a:rPr>
+              <a:t>"Sam reads a book at home."</a:t>
             </a:r>
           </a:p>
         </p:txBody>
@@ -8344,7 +8608,7 @@
                 <a:ea typeface="JetBrains Mono"/>
                 <a:cs typeface="JetBrains Mono"/>
               </a:rPr>
-              <a:t>"Choose walk or read: "</a:t>
+              <a:t>"Choose cycle or read: "</a:t>
             </a:r>
             <a:r>
               <a:rPr sz="1600">
@@ -8357,6 +8621,16 @@
               </a:rPr>
               <a:t>)</a:t>
             </a:r>
+            <a:br>
+              <a:rPr sz="1600">
+                <a:solidFill>
+                  <a:srgbClr val="080808"/>
+                </a:solidFill>
+                <a:latin typeface="JetBrains Mono"/>
+                <a:ea typeface="JetBrains Mono"/>
+                <a:cs typeface="JetBrains Mono"/>
+              </a:rPr>
+            </a:br>
             <a:br>
               <a:rPr sz="1600">
                 <a:solidFill>
@@ -8420,7 +8694,7 @@
                 <a:ea typeface="JetBrains Mono"/>
                 <a:cs typeface="JetBrains Mono"/>
               </a:rPr>
-              <a:t>"walk"</a:t>
+              <a:t>"cycle"</a:t>
             </a:r>
             <a:r>
               <a:rPr sz="1600">
@@ -8485,7 +8759,7 @@
                 <a:ea typeface="JetBrains Mono"/>
                 <a:cs typeface="JetBrains Mono"/>
               </a:rPr>
-              <a:t>"Take a walk in the park."</a:t>
+              <a:t>"Ride a bike in the park."</a:t>
             </a:r>
             <a:r>
               <a:rPr sz="1600">
@@ -8697,7 +8971,7 @@
                 <a:ea typeface="Calibri"/>
                 <a:cs typeface="Calibri"/>
               </a:rPr>
-              <a:t>A cafe asks, </a:t>
+              <a:t>Ask </a:t>
             </a:r>
             <a:r>
               <a:rPr sz="2400" b="0">
@@ -8719,7 +8993,7 @@
                 <a:ea typeface="Calibri"/>
                 <a:cs typeface="Calibri"/>
               </a:rPr>
-              <a:t> Use </a:t>
+              <a:t> and store the answer in [answer]. Use </a:t>
             </a:r>
             <a:r>
               <a:rPr sz="2400" b="0">
@@ -8763,7 +9037,7 @@
                 <a:ea typeface="Calibri"/>
                 <a:cs typeface="Calibri"/>
               </a:rPr>
-              <a:t> to build a two-way choice: yes displays </a:t>
+              <a:t> so </a:t>
             </a:r>
             <a:r>
               <a:rPr sz="2400" b="0">
@@ -8774,7 +9048,7 @@
                 <a:ea typeface="JetBrains Mono"/>
                 <a:cs typeface="JetBrains Mono"/>
               </a:rPr>
-              <a:t>"Tea is ready."</a:t>
+              <a:t>"yes"</a:t>
             </a:r>
             <a:r>
               <a:rPr sz="2400" b="0">
@@ -8785,7 +9059,7 @@
                 <a:ea typeface="Calibri"/>
                 <a:cs typeface="Calibri"/>
               </a:rPr>
-              <a:t>; every other answer displays </a:t>
+              <a:t> displays </a:t>
             </a:r>
             <a:r>
               <a:rPr sz="2400" b="0">
@@ -8796,7 +9070,7 @@
                 <a:ea typeface="JetBrains Mono"/>
                 <a:cs typeface="JetBrains Mono"/>
               </a:rPr>
-              <a:t>"Choose another drink."</a:t>
+              <a:t>"Tea is ready."</a:t>
             </a:r>
             <a:r>
               <a:rPr sz="2400" b="0">
@@ -8807,7 +9081,106 @@
                 <a:ea typeface="Calibri"/>
                 <a:cs typeface="Calibri"/>
               </a:rPr>
-              <a:t> Test one input for each route.</a:t>
+              <a:t> and every other answer displays </a:t>
+            </a:r>
+            <a:r>
+              <a:rPr sz="2400" b="0">
+                <a:solidFill>
+                  <a:srgbClr val="067D17"/>
+                </a:solidFill>
+                <a:latin typeface="JetBrains Mono"/>
+                <a:ea typeface="JetBrains Mono"/>
+                <a:cs typeface="JetBrains Mono"/>
+              </a:rPr>
+              <a:t>"Choose another drink."</a:t>
+            </a:r>
+            <a:r>
+              <a:rPr sz="2400" b="0">
+                <a:solidFill>
+                  <a:srgbClr val="080808"/>
+                </a:solidFill>
+                <a:latin typeface="Calibri"/>
+                <a:ea typeface="Calibri"/>
+                <a:cs typeface="Calibri"/>
+              </a:rPr>
+              <a:t> Test </a:t>
+            </a:r>
+            <a:r>
+              <a:rPr sz="2400" b="0">
+                <a:solidFill>
+                  <a:srgbClr val="067D17"/>
+                </a:solidFill>
+                <a:latin typeface="JetBrains Mono"/>
+                <a:ea typeface="JetBrains Mono"/>
+                <a:cs typeface="JetBrains Mono"/>
+              </a:rPr>
+              <a:t>"yes"</a:t>
+            </a:r>
+            <a:r>
+              <a:rPr sz="2400" b="0">
+                <a:solidFill>
+                  <a:srgbClr val="080808"/>
+                </a:solidFill>
+                <a:latin typeface="Calibri"/>
+                <a:ea typeface="Calibri"/>
+                <a:cs typeface="Calibri"/>
+              </a:rPr>
+              <a:t>; display </a:t>
+            </a:r>
+            <a:r>
+              <a:rPr sz="2400" b="0">
+                <a:solidFill>
+                  <a:srgbClr val="067D17"/>
+                </a:solidFill>
+                <a:latin typeface="JetBrains Mono"/>
+                <a:ea typeface="JetBrains Mono"/>
+                <a:cs typeface="JetBrains Mono"/>
+              </a:rPr>
+              <a:t>"Tea is ready."</a:t>
+            </a:r>
+            <a:r>
+              <a:rPr sz="2400" b="0">
+                <a:solidFill>
+                  <a:srgbClr val="080808"/>
+                </a:solidFill>
+                <a:latin typeface="Calibri"/>
+                <a:ea typeface="Calibri"/>
+                <a:cs typeface="Calibri"/>
+              </a:rPr>
+              <a:t> Test </a:t>
+            </a:r>
+            <a:r>
+              <a:rPr sz="2400" b="0">
+                <a:solidFill>
+                  <a:srgbClr val="067D17"/>
+                </a:solidFill>
+                <a:latin typeface="JetBrains Mono"/>
+                <a:ea typeface="JetBrains Mono"/>
+                <a:cs typeface="JetBrains Mono"/>
+              </a:rPr>
+              <a:t>"no"</a:t>
+            </a:r>
+            <a:r>
+              <a:rPr sz="2400" b="0">
+                <a:solidFill>
+                  <a:srgbClr val="080808"/>
+                </a:solidFill>
+                <a:latin typeface="Calibri"/>
+                <a:ea typeface="Calibri"/>
+                <a:cs typeface="Calibri"/>
+              </a:rPr>
+              <a:t>; display </a:t>
+            </a:r>
+            <a:r>
+              <a:rPr sz="2400" b="0">
+                <a:solidFill>
+                  <a:srgbClr val="067D17"/>
+                </a:solidFill>
+                <a:latin typeface="JetBrains Mono"/>
+                <a:ea typeface="JetBrains Mono"/>
+                <a:cs typeface="JetBrains Mono"/>
+              </a:rPr>
+              <a:t>"Choose another drink."</a:t>
             </a:r>
           </a:p>
         </p:txBody>

--- a/Mapped Curriculum Lessons/Grade 6/Lesson 04 - Decisions/Decisions - Slides.pptx
+++ b/Mapped Curriculum Lessons/Grade 6/Lesson 04 - Decisions/Decisions - Slides.pptx
@@ -2,28 +2,28 @@
 <file path=ppt/presentation.xml><?xml version="1.0" encoding="utf-8"?>
 <p:presentation xmlns:p="http://schemas.openxmlformats.org/presentationml/2006/main" embedTrueTypeFonts="1" saveSubsetFonts="0">
   <p:sldMasterIdLst>
-    <p:sldMasterId xmlns:r="http://schemas.openxmlformats.org/officeDocument/2006/relationships" id="2147483648" r:id="R2d2169a4ba184157"/>
+    <p:sldMasterId xmlns:r="http://schemas.openxmlformats.org/officeDocument/2006/relationships" id="2147483648" r:id="Ra49058899bbf4668"/>
   </p:sldMasterIdLst>
   <p:notesMasterIdLst>
-    <p:notesMasterId xmlns:r="http://schemas.openxmlformats.org/officeDocument/2006/relationships" r:id="Rbd6a24eba3d24b74"/>
+    <p:notesMasterId xmlns:r="http://schemas.openxmlformats.org/officeDocument/2006/relationships" r:id="Rffc1c6efbcb44709"/>
   </p:notesMasterIdLst>
   <p:sldIdLst>
-    <p:sldId xmlns:r="http://schemas.openxmlformats.org/officeDocument/2006/relationships" id="256" r:id="R393b67ce76a94f9c"/>
-    <p:sldId xmlns:r="http://schemas.openxmlformats.org/officeDocument/2006/relationships" id="257" r:id="R90159627a1804b60"/>
-    <p:sldId xmlns:r="http://schemas.openxmlformats.org/officeDocument/2006/relationships" id="258" r:id="Ra15482000c104cdd"/>
-    <p:sldId xmlns:r="http://schemas.openxmlformats.org/officeDocument/2006/relationships" id="259" r:id="R9d6a02dd846244ff"/>
-    <p:sldId xmlns:r="http://schemas.openxmlformats.org/officeDocument/2006/relationships" id="260" r:id="R0b0371e4e1564d84"/>
-    <p:sldId xmlns:r="http://schemas.openxmlformats.org/officeDocument/2006/relationships" id="261" r:id="Re8a8cceb84074260"/>
-    <p:sldId xmlns:r="http://schemas.openxmlformats.org/officeDocument/2006/relationships" id="262" r:id="Rc78bd60a06204e5a"/>
-    <p:sldId xmlns:r="http://schemas.openxmlformats.org/officeDocument/2006/relationships" id="263" r:id="R73dfcf4d0a9147d6"/>
-    <p:sldId xmlns:r="http://schemas.openxmlformats.org/officeDocument/2006/relationships" id="264" r:id="R0b584f9742e643d1"/>
+    <p:sldId xmlns:r="http://schemas.openxmlformats.org/officeDocument/2006/relationships" id="256" r:id="R10ef252e7b0140fe"/>
+    <p:sldId xmlns:r="http://schemas.openxmlformats.org/officeDocument/2006/relationships" id="257" r:id="R621f2cc1e342469f"/>
+    <p:sldId xmlns:r="http://schemas.openxmlformats.org/officeDocument/2006/relationships" id="258" r:id="Re045bdbdc72b4ad0"/>
+    <p:sldId xmlns:r="http://schemas.openxmlformats.org/officeDocument/2006/relationships" id="259" r:id="R20f1052699334893"/>
+    <p:sldId xmlns:r="http://schemas.openxmlformats.org/officeDocument/2006/relationships" id="260" r:id="Rf43bc290eee14fc4"/>
+    <p:sldId xmlns:r="http://schemas.openxmlformats.org/officeDocument/2006/relationships" id="261" r:id="R0f36d9f118eb4fac"/>
+    <p:sldId xmlns:r="http://schemas.openxmlformats.org/officeDocument/2006/relationships" id="262" r:id="Rec8d40649cec4cde"/>
+    <p:sldId xmlns:r="http://schemas.openxmlformats.org/officeDocument/2006/relationships" id="263" r:id="R09b55aa7e9224f21"/>
+    <p:sldId xmlns:r="http://schemas.openxmlformats.org/officeDocument/2006/relationships" id="264" r:id="R3b1c485e52694bc8"/>
   </p:sldIdLst>
   <p:sldSz cx="12192000" cy="6858000"/>
   <p:notesSz cx="6858000" cy="9144000"/>
   <p:embeddedFontLst>
     <p:embeddedFont>
       <p:font typeface="JetBrains Mono"/>
-      <p:regular xmlns:r="http://schemas.openxmlformats.org/officeDocument/2006/relationships" r:id="R3e99000227d94082"/>
+      <p:regular xmlns:r="http://schemas.openxmlformats.org/officeDocument/2006/relationships" r:id="Rea81bee1d83f4266"/>
     </p:embeddedFont>
   </p:embeddedFontLst>
 </p:presentation>
@@ -1071,7 +1071,7 @@
           <p:nvPr/>
         </p:nvPicPr>
         <p:blipFill rotWithShape="1">
-          <a:blip xmlns:r="http://schemas.openxmlformats.org/officeDocument/2006/relationships" xmlns:a="http://schemas.openxmlformats.org/drawingml/2006/main" r:embed="R22a1479f7d7e4d81"/>
+          <a:blip xmlns:r="http://schemas.openxmlformats.org/officeDocument/2006/relationships" xmlns:a="http://schemas.openxmlformats.org/drawingml/2006/main" r:embed="R2a1b71966cfa4559"/>
           <a:stretch xmlns:a="http://schemas.openxmlformats.org/drawingml/2006/main"/>
         </p:blipFill>
         <p:spPr>
@@ -1451,7 +1451,7 @@
           <p:nvPr/>
         </p:nvPicPr>
         <p:blipFill rotWithShape="1">
-          <a:blip xmlns:r="http://schemas.openxmlformats.org/officeDocument/2006/relationships" xmlns:a="http://schemas.openxmlformats.org/drawingml/2006/main" r:embed="Red44a44fb3194469">
+          <a:blip xmlns:r="http://schemas.openxmlformats.org/officeDocument/2006/relationships" xmlns:a="http://schemas.openxmlformats.org/drawingml/2006/main" r:embed="Rc4a52261eeb64e85">
             <a:alphaModFix amt="28000"/>
           </a:blip>
           <a:stretch xmlns:a="http://schemas.openxmlformats.org/drawingml/2006/main"/>
@@ -1664,7 +1664,7 @@
           <p:nvPr/>
         </p:nvPicPr>
         <p:blipFill rotWithShape="1">
-          <a:blip xmlns:r="http://schemas.openxmlformats.org/officeDocument/2006/relationships" xmlns:a="http://schemas.openxmlformats.org/drawingml/2006/main" r:embed="R5148d84cbc244196">
+          <a:blip xmlns:r="http://schemas.openxmlformats.org/officeDocument/2006/relationships" xmlns:a="http://schemas.openxmlformats.org/drawingml/2006/main" r:embed="R3770906b612746af">
             <a:alphaModFix amt="28000"/>
           </a:blip>
           <a:stretch xmlns:a="http://schemas.openxmlformats.org/drawingml/2006/main"/>
@@ -1899,7 +1899,7 @@
           <p:nvPr/>
         </p:nvPicPr>
         <p:blipFill rotWithShape="1">
-          <a:blip xmlns:r="http://schemas.openxmlformats.org/officeDocument/2006/relationships" xmlns:a="http://schemas.openxmlformats.org/drawingml/2006/main" r:embed="R2ebacfe9a6dc4b18">
+          <a:blip xmlns:r="http://schemas.openxmlformats.org/officeDocument/2006/relationships" xmlns:a="http://schemas.openxmlformats.org/drawingml/2006/main" r:embed="R395e297911c343f4">
             <a:alphaModFix amt="28000"/>
           </a:blip>
           <a:stretch xmlns:a="http://schemas.openxmlformats.org/drawingml/2006/main"/>
@@ -2176,7 +2176,7 @@
           <p:nvPr/>
         </p:nvPicPr>
         <p:blipFill rotWithShape="1">
-          <a:blip xmlns:r="http://schemas.openxmlformats.org/officeDocument/2006/relationships" xmlns:a="http://schemas.openxmlformats.org/drawingml/2006/main" r:embed="R5838127b7a394f21">
+          <a:blip xmlns:r="http://schemas.openxmlformats.org/officeDocument/2006/relationships" xmlns:a="http://schemas.openxmlformats.org/drawingml/2006/main" r:embed="Rddec2093c83c4fa7">
             <a:alphaModFix amt="28000"/>
           </a:blip>
           <a:stretch xmlns:a="http://schemas.openxmlformats.org/drawingml/2006/main"/>
@@ -2451,7 +2451,7 @@
           <p:nvPr/>
         </p:nvPicPr>
         <p:blipFill rotWithShape="1">
-          <a:blip xmlns:r="http://schemas.openxmlformats.org/officeDocument/2006/relationships" xmlns:a="http://schemas.openxmlformats.org/drawingml/2006/main" r:embed="Rcb3c116ee8524577">
+          <a:blip xmlns:r="http://schemas.openxmlformats.org/officeDocument/2006/relationships" xmlns:a="http://schemas.openxmlformats.org/drawingml/2006/main" r:embed="R00634f5a3bec435c">
             <a:alphaModFix amt="28000"/>
           </a:blip>
           <a:stretch xmlns:a="http://schemas.openxmlformats.org/drawingml/2006/main"/>
@@ -2875,7 +2875,7 @@
           <p:nvPr/>
         </p:nvPicPr>
         <p:blipFill rotWithShape="1">
-          <a:blip xmlns:r="http://schemas.openxmlformats.org/officeDocument/2006/relationships" xmlns:a="http://schemas.openxmlformats.org/drawingml/2006/main" r:embed="R276fed3b1ba94549">
+          <a:blip xmlns:r="http://schemas.openxmlformats.org/officeDocument/2006/relationships" xmlns:a="http://schemas.openxmlformats.org/drawingml/2006/main" r:embed="R1c3d4826329948f4">
             <a:alphaModFix amt="28000"/>
           </a:blip>
           <a:stretch xmlns:a="http://schemas.openxmlformats.org/drawingml/2006/main"/>
@@ -3016,7 +3016,7 @@
           <p:nvPr/>
         </p:nvPicPr>
         <p:blipFill rotWithShape="1">
-          <a:blip xmlns:r="http://schemas.openxmlformats.org/officeDocument/2006/relationships" xmlns:a="http://schemas.openxmlformats.org/drawingml/2006/main" r:embed="Rf435a44f3d43476c">
+          <a:blip xmlns:r="http://schemas.openxmlformats.org/officeDocument/2006/relationships" xmlns:a="http://schemas.openxmlformats.org/drawingml/2006/main" r:embed="R3fc5d66dd77141cc">
             <a:alphaModFix amt="28000"/>
           </a:blip>
           <a:stretch xmlns:a="http://schemas.openxmlformats.org/drawingml/2006/main"/>
@@ -3130,7 +3130,7 @@
           <p:nvPr/>
         </p:nvPicPr>
         <p:blipFill rotWithShape="1">
-          <a:blip xmlns:r="http://schemas.openxmlformats.org/officeDocument/2006/relationships" xmlns:a="http://schemas.openxmlformats.org/drawingml/2006/main" r:embed="Rd06b252bc8b84ef3">
+          <a:blip xmlns:r="http://schemas.openxmlformats.org/officeDocument/2006/relationships" xmlns:a="http://schemas.openxmlformats.org/drawingml/2006/main" r:embed="R15f0bc73e7e84936">
             <a:alphaModFix amt="28000"/>
           </a:blip>
           <a:stretch xmlns:a="http://schemas.openxmlformats.org/drawingml/2006/main"/>
@@ -3457,7 +3457,7 @@
           <p:nvPr/>
         </p:nvPicPr>
         <p:blipFill rotWithShape="1">
-          <a:blip xmlns:r="http://schemas.openxmlformats.org/officeDocument/2006/relationships" xmlns:a="http://schemas.openxmlformats.org/drawingml/2006/main" r:embed="R9e34282b6b7e4276">
+          <a:blip xmlns:r="http://schemas.openxmlformats.org/officeDocument/2006/relationships" xmlns:a="http://schemas.openxmlformats.org/drawingml/2006/main" r:embed="R98bfa4912763433a">
             <a:alphaModFix amt="28000"/>
           </a:blip>
           <a:stretch xmlns:a="http://schemas.openxmlformats.org/drawingml/2006/main"/>
@@ -3745,7 +3745,7 @@
           <p:nvPr/>
         </p:nvPicPr>
         <p:blipFill rotWithShape="1">
-          <a:blip xmlns:r="http://schemas.openxmlformats.org/officeDocument/2006/relationships" xmlns:a="http://schemas.openxmlformats.org/drawingml/2006/main" r:embed="R1e8146b7e54e4004">
+          <a:blip xmlns:r="http://schemas.openxmlformats.org/officeDocument/2006/relationships" xmlns:a="http://schemas.openxmlformats.org/drawingml/2006/main" r:embed="R679b309b7cf1477f">
             <a:alphaModFix amt="28000"/>
           </a:blip>
           <a:stretch xmlns:a="http://schemas.openxmlformats.org/drawingml/2006/main"/>
@@ -3982,17 +3982,17 @@
   </p:cSld>
   <p:clrMap bg1="lt1" tx1="dk1" bg2="lt2" tx2="dk2" accent1="accent1" accent2="accent2" accent3="accent3" accent4="accent4" accent5="accent5" accent6="accent6" hlink="hlink" folHlink="folHlink"/>
   <p:sldLayoutIdLst>
-    <p:sldLayoutId xmlns:r="http://schemas.openxmlformats.org/officeDocument/2006/relationships" id="2147483649" r:id="Re46b3c7b596d43bd"/>
-    <p:sldLayoutId xmlns:r="http://schemas.openxmlformats.org/officeDocument/2006/relationships" id="2147483650" r:id="R2097e76a7621407f"/>
-    <p:sldLayoutId xmlns:r="http://schemas.openxmlformats.org/officeDocument/2006/relationships" id="2147483651" r:id="R4f9f18fdd2e74ef7"/>
-    <p:sldLayoutId xmlns:r="http://schemas.openxmlformats.org/officeDocument/2006/relationships" id="2147483652" r:id="R78d6fb53817d431f"/>
-    <p:sldLayoutId xmlns:r="http://schemas.openxmlformats.org/officeDocument/2006/relationships" id="2147483653" r:id="Ra0665b770c9d4272"/>
-    <p:sldLayoutId xmlns:r="http://schemas.openxmlformats.org/officeDocument/2006/relationships" id="2147483654" r:id="R491da08793cd41c8"/>
-    <p:sldLayoutId xmlns:r="http://schemas.openxmlformats.org/officeDocument/2006/relationships" id="2147483655" r:id="R433f23921cfe4a1a"/>
-    <p:sldLayoutId xmlns:r="http://schemas.openxmlformats.org/officeDocument/2006/relationships" id="2147483656" r:id="R844c44ba63db4e03"/>
-    <p:sldLayoutId xmlns:r="http://schemas.openxmlformats.org/officeDocument/2006/relationships" id="2147483657" r:id="R755bdceb85e54dec"/>
-    <p:sldLayoutId xmlns:r="http://schemas.openxmlformats.org/officeDocument/2006/relationships" id="2147483658" r:id="Raff1d9a0ac2c4df2"/>
-    <p:sldLayoutId xmlns:r="http://schemas.openxmlformats.org/officeDocument/2006/relationships" id="2147483659" r:id="Rd1f90bc536f240a7"/>
+    <p:sldLayoutId xmlns:r="http://schemas.openxmlformats.org/officeDocument/2006/relationships" id="2147483649" r:id="Rd63cc376519e4da3"/>
+    <p:sldLayoutId xmlns:r="http://schemas.openxmlformats.org/officeDocument/2006/relationships" id="2147483650" r:id="R665e322d59dc4067"/>
+    <p:sldLayoutId xmlns:r="http://schemas.openxmlformats.org/officeDocument/2006/relationships" id="2147483651" r:id="Ra99b3d98316540d6"/>
+    <p:sldLayoutId xmlns:r="http://schemas.openxmlformats.org/officeDocument/2006/relationships" id="2147483652" r:id="R5d286a23e349499b"/>
+    <p:sldLayoutId xmlns:r="http://schemas.openxmlformats.org/officeDocument/2006/relationships" id="2147483653" r:id="R60787c27fa3f4650"/>
+    <p:sldLayoutId xmlns:r="http://schemas.openxmlformats.org/officeDocument/2006/relationships" id="2147483654" r:id="R8557ca9d22a6449c"/>
+    <p:sldLayoutId xmlns:r="http://schemas.openxmlformats.org/officeDocument/2006/relationships" id="2147483655" r:id="R15ce0c62ebcf457e"/>
+    <p:sldLayoutId xmlns:r="http://schemas.openxmlformats.org/officeDocument/2006/relationships" id="2147483656" r:id="R9163e4529d56430a"/>
+    <p:sldLayoutId xmlns:r="http://schemas.openxmlformats.org/officeDocument/2006/relationships" id="2147483657" r:id="R84917692d95a4fc9"/>
+    <p:sldLayoutId xmlns:r="http://schemas.openxmlformats.org/officeDocument/2006/relationships" id="2147483658" r:id="R012aa0a6c78d45f4"/>
+    <p:sldLayoutId xmlns:r="http://schemas.openxmlformats.org/officeDocument/2006/relationships" id="2147483659" r:id="Rc13ff63436ce4000"/>
   </p:sldLayoutIdLst>
   <p:hf hdr="0" ftr="0" dt="0"/>
   <p:txStyles>
@@ -7232,7 +7232,7 @@
         </p:spPr>
         <p:txBody>
           <a:bodyPr xmlns:a="http://schemas.openxmlformats.org/drawingml/2006/main">
-            <a:normAutofit fontScale="91261"/>
+            <a:normAutofit fontScale="100000"/>
           </a:bodyPr>
           <a:lstStyle xmlns:a="http://schemas.openxmlformats.org/drawingml/2006/main"/>
           <a:p xmlns:a="http://schemas.openxmlformats.org/drawingml/2006/main">
@@ -7251,18 +7251,18 @@
                 <a:ea typeface="Calibri"/>
                 <a:cs typeface="Calibri"/>
               </a:rPr>
-              <a:t>Change the first choice from </a:t>
-            </a:r>
-            <a:r>
-              <a:rPr sz="2400" b="0">
-                <a:solidFill>
-                  <a:srgbClr val="067D17"/>
-                </a:solidFill>
-                <a:latin typeface="JetBrains Mono"/>
-                <a:ea typeface="JetBrains Mono"/>
-                <a:cs typeface="JetBrains Mono"/>
-              </a:rPr>
-              <a:t>"walk"</a:t>
+              <a:t>Change the </a:t>
+            </a:r>
+            <a:r>
+              <a:rPr sz="2050" b="0">
+                <a:solidFill>
+                  <a:srgbClr val="1750EB"/>
+                </a:solidFill>
+                <a:latin typeface="JetBrains Mono"/>
+                <a:ea typeface="JetBrains Mono"/>
+                <a:cs typeface="JetBrains Mono"/>
+              </a:rPr>
+              <a:t>if</a:t>
             </a:r>
             <a:r>
               <a:rPr sz="2400" b="0">
@@ -7273,10 +7273,10 @@
                 <a:ea typeface="Calibri"/>
                 <a:cs typeface="Calibri"/>
               </a:rPr>
-              <a:t> to </a:t>
-            </a:r>
-            <a:r>
-              <a:rPr sz="2400" b="0">
+              <a:t> condition in the example so it checks for </a:t>
+            </a:r>
+            <a:r>
+              <a:rPr sz="2050" b="0">
                 <a:solidFill>
                   <a:srgbClr val="067D17"/>
                 </a:solidFill>
@@ -7284,7 +7284,7 @@
                 <a:ea typeface="JetBrains Mono"/>
                 <a:cs typeface="JetBrains Mono"/>
               </a:rPr>
-              <a:t>"cycle"</a:t>
+              <a:t>"read"</a:t>
             </a:r>
             <a:r>
               <a:rPr sz="2400" b="0">
@@ -7295,18 +7295,18 @@
                 <a:ea typeface="Calibri"/>
                 <a:cs typeface="Calibri"/>
               </a:rPr>
-              <a:t>. Update the input message, the </a:t>
-            </a:r>
-            <a:r>
-              <a:rPr sz="2400" b="0">
-                <a:solidFill>
-                  <a:srgbClr val="1750EB"/>
-                </a:solidFill>
-                <a:latin typeface="JetBrains Mono"/>
-                <a:ea typeface="JetBrains Mono"/>
-                <a:cs typeface="JetBrains Mono"/>
-              </a:rPr>
-              <a:t>if</a:t>
+              <a:t> instead of </a:t>
+            </a:r>
+            <a:r>
+              <a:rPr sz="2050" b="0">
+                <a:solidFill>
+                  <a:srgbClr val="067D17"/>
+                </a:solidFill>
+                <a:latin typeface="JetBrains Mono"/>
+                <a:ea typeface="JetBrains Mono"/>
+                <a:cs typeface="JetBrains Mono"/>
+              </a:rPr>
+              <a:t>"walk"</a:t>
             </a:r>
             <a:r>
               <a:rPr sz="2400" b="0">
@@ -7317,18 +7317,18 @@
                 <a:ea typeface="Calibri"/>
                 <a:cs typeface="Calibri"/>
               </a:rPr>
-              <a:t> comparison and its output so </a:t>
-            </a:r>
-            <a:r>
-              <a:rPr sz="2400" b="0">
-                <a:solidFill>
-                  <a:srgbClr val="067D17"/>
-                </a:solidFill>
-                <a:latin typeface="JetBrains Mono"/>
-                <a:ea typeface="JetBrains Mono"/>
-                <a:cs typeface="JetBrains Mono"/>
-              </a:rPr>
-              <a:t>"cycle"</a:t>
+              <a:t>. Swap the two </a:t>
+            </a:r>
+            <a:r>
+              <a:rPr sz="2050" b="0">
+                <a:solidFill>
+                  <a:srgbClr val="1750EB"/>
+                </a:solidFill>
+                <a:latin typeface="JetBrains Mono"/>
+                <a:ea typeface="JetBrains Mono"/>
+                <a:cs typeface="JetBrains Mono"/>
+              </a:rPr>
+              <a:t>print()</a:t>
             </a:r>
             <a:r>
               <a:rPr sz="2400" b="0">
@@ -7339,10 +7339,10 @@
                 <a:ea typeface="Calibri"/>
                 <a:cs typeface="Calibri"/>
               </a:rPr>
-              <a:t> displays </a:t>
-            </a:r>
-            <a:r>
-              <a:rPr sz="2400" b="0">
+              <a:t> lines so each choice still gets the right message. Predict what </a:t>
+            </a:r>
+            <a:r>
+              <a:rPr sz="2050" b="0">
                 <a:solidFill>
                   <a:srgbClr val="067D17"/>
                 </a:solidFill>
@@ -7350,7 +7350,7 @@
                 <a:ea typeface="JetBrains Mono"/>
                 <a:cs typeface="JetBrains Mono"/>
               </a:rPr>
-              <a:t>"Ride a bike in the park."</a:t>
+              <a:t>"swim"</a:t>
             </a:r>
             <a:r>
               <a:rPr sz="2400" b="0">
@@ -7361,106 +7361,7 @@
                 <a:ea typeface="Calibri"/>
                 <a:cs typeface="Calibri"/>
               </a:rPr>
-              <a:t> Keep the </a:t>
-            </a:r>
-            <a:r>
-              <a:rPr sz="2400" b="0">
-                <a:solidFill>
-                  <a:srgbClr val="067D17"/>
-                </a:solidFill>
-                <a:latin typeface="JetBrains Mono"/>
-                <a:ea typeface="JetBrains Mono"/>
-                <a:cs typeface="JetBrains Mono"/>
-              </a:rPr>
-              <a:t>"read"</a:t>
-            </a:r>
-            <a:r>
-              <a:rPr sz="2400" b="0">
-                <a:solidFill>
-                  <a:srgbClr val="080808"/>
-                </a:solidFill>
-                <a:latin typeface="Calibri"/>
-                <a:ea typeface="Calibri"/>
-                <a:cs typeface="Calibri"/>
-              </a:rPr>
-              <a:t> choice and its output unchanged. Test </a:t>
-            </a:r>
-            <a:r>
-              <a:rPr sz="2400" b="0">
-                <a:solidFill>
-                  <a:srgbClr val="067D17"/>
-                </a:solidFill>
-                <a:latin typeface="JetBrains Mono"/>
-                <a:ea typeface="JetBrains Mono"/>
-                <a:cs typeface="JetBrains Mono"/>
-              </a:rPr>
-              <a:t>"cycle"</a:t>
-            </a:r>
-            <a:r>
-              <a:rPr sz="2400" b="0">
-                <a:solidFill>
-                  <a:srgbClr val="080808"/>
-                </a:solidFill>
-                <a:latin typeface="Calibri"/>
-                <a:ea typeface="Calibri"/>
-                <a:cs typeface="Calibri"/>
-              </a:rPr>
-              <a:t>; display </a:t>
-            </a:r>
-            <a:r>
-              <a:rPr sz="2400" b="0">
-                <a:solidFill>
-                  <a:srgbClr val="067D17"/>
-                </a:solidFill>
-                <a:latin typeface="JetBrains Mono"/>
-                <a:ea typeface="JetBrains Mono"/>
-                <a:cs typeface="JetBrains Mono"/>
-              </a:rPr>
-              <a:t>"Ride a bike in the park."</a:t>
-            </a:r>
-            <a:r>
-              <a:rPr sz="2400" b="0">
-                <a:solidFill>
-                  <a:srgbClr val="080808"/>
-                </a:solidFill>
-                <a:latin typeface="Calibri"/>
-                <a:ea typeface="Calibri"/>
-                <a:cs typeface="Calibri"/>
-              </a:rPr>
-              <a:t> Test </a:t>
-            </a:r>
-            <a:r>
-              <a:rPr sz="2400" b="0">
-                <a:solidFill>
-                  <a:srgbClr val="067D17"/>
-                </a:solidFill>
-                <a:latin typeface="JetBrains Mono"/>
-                <a:ea typeface="JetBrains Mono"/>
-                <a:cs typeface="JetBrains Mono"/>
-              </a:rPr>
-              <a:t>"read"</a:t>
-            </a:r>
-            <a:r>
-              <a:rPr sz="2400" b="0">
-                <a:solidFill>
-                  <a:srgbClr val="080808"/>
-                </a:solidFill>
-                <a:latin typeface="Calibri"/>
-                <a:ea typeface="Calibri"/>
-                <a:cs typeface="Calibri"/>
-              </a:rPr>
-              <a:t>; display </a:t>
-            </a:r>
-            <a:r>
-              <a:rPr sz="2400" b="0">
-                <a:solidFill>
-                  <a:srgbClr val="067D17"/>
-                </a:solidFill>
-                <a:latin typeface="JetBrains Mono"/>
-                <a:ea typeface="JetBrains Mono"/>
-                <a:cs typeface="JetBrains Mono"/>
-              </a:rPr>
-              <a:t>"Read a book at home."</a:t>
+              <a:t> will display, then test it.</a:t>
             </a:r>
           </a:p>
         </p:txBody>
@@ -8128,18 +8029,21 @@
                 <a:ea typeface="Calibri"/>
                 <a:cs typeface="Calibri"/>
               </a:rPr>
-              <a:t>Start with your Challenge 1 program. Ask for the user's name and store it in [name] before asking for </a:t>
-            </a:r>
-            <a:r>
-              <a:rPr sz="2400" b="0">
-                <a:solidFill>
-                  <a:srgbClr val="067D17"/>
-                </a:solidFill>
-                <a:latin typeface="JetBrains Mono"/>
-                <a:ea typeface="JetBrains Mono"/>
-                <a:cs typeface="JetBrains Mono"/>
-              </a:rPr>
-              <a:t>"cycle"</a:t>
+              <a:t>Extend the example so it asks for the user's name first and stores it in </a:t>
+            </a:r>
+            <a:r>
+              <a:rPr sz="2050" b="0">
+                <a:solidFill>
+                  <a:srgbClr val="6A1B9A"/>
+                </a:solidFill>
+                <a:highlight>
+                  <a:srgbClr val="ECEAF4"/>
+                </a:highlight>
+                <a:latin typeface="JetBrains Mono"/>
+                <a:ea typeface="JetBrains Mono"/>
+                <a:cs typeface="JetBrains Mono"/>
+              </a:rPr>
+              <a:t> name </a:t>
             </a:r>
             <a:r>
               <a:rPr sz="2400" b="0">
@@ -8150,18 +8054,21 @@
                 <a:ea typeface="Calibri"/>
                 <a:cs typeface="Calibri"/>
               </a:rPr>
-              <a:t> or </a:t>
-            </a:r>
-            <a:r>
-              <a:rPr sz="2400" b="0">
-                <a:solidFill>
-                  <a:srgbClr val="067D17"/>
-                </a:solidFill>
-                <a:latin typeface="JetBrains Mono"/>
-                <a:ea typeface="JetBrains Mono"/>
-                <a:cs typeface="JetBrains Mono"/>
-              </a:rPr>
-              <a:t>"read"</a:t>
+              <a:t>. Include </a:t>
+            </a:r>
+            <a:r>
+              <a:rPr sz="2050" b="0">
+                <a:solidFill>
+                  <a:srgbClr val="6A1B9A"/>
+                </a:solidFill>
+                <a:highlight>
+                  <a:srgbClr val="ECEAF4"/>
+                </a:highlight>
+                <a:latin typeface="JetBrains Mono"/>
+                <a:ea typeface="JetBrains Mono"/>
+                <a:cs typeface="JetBrains Mono"/>
+              </a:rPr>
+              <a:t> name </a:t>
             </a:r>
             <a:r>
               <a:rPr sz="2400" b="0">
@@ -8172,10 +8079,10 @@
                 <a:ea typeface="Calibri"/>
                 <a:cs typeface="Calibri"/>
               </a:rPr>
-              <a:t>. Include [name] in both outputs. Test </a:t>
-            </a:r>
-            <a:r>
-              <a:rPr sz="2400" b="0">
+              <a:t> in both messages. For example, </a:t>
+            </a:r>
+            <a:r>
+              <a:rPr sz="2050" b="0">
                 <a:solidFill>
                   <a:srgbClr val="067D17"/>
                 </a:solidFill>
@@ -8197,7 +8104,7 @@
               <a:t> and </a:t>
             </a:r>
             <a:r>
-              <a:rPr sz="2400" b="0">
+              <a:rPr sz="2050" b="0">
                 <a:solidFill>
                   <a:srgbClr val="067D17"/>
                 </a:solidFill>
@@ -8205,7 +8112,7 @@
                 <a:ea typeface="JetBrains Mono"/>
                 <a:cs typeface="JetBrains Mono"/>
               </a:rPr>
-              <a:t>"cycle"</a:t>
+              <a:t>"walk"</a:t>
             </a:r>
             <a:r>
               <a:rPr sz="2400" b="0">
@@ -8216,10 +8123,10 @@
                 <a:ea typeface="Calibri"/>
                 <a:cs typeface="Calibri"/>
               </a:rPr>
-              <a:t>; display </a:t>
-            </a:r>
-            <a:r>
-              <a:rPr sz="2400" b="0">
+              <a:t> display </a:t>
+            </a:r>
+            <a:r>
+              <a:rPr sz="2050" b="0">
                 <a:solidFill>
                   <a:srgbClr val="067D17"/>
                 </a:solidFill>
@@ -8227,73 +8134,7 @@
                 <a:ea typeface="JetBrains Mono"/>
                 <a:cs typeface="JetBrains Mono"/>
               </a:rPr>
-              <a:t>"Sam rides a bike in the park."</a:t>
-            </a:r>
-            <a:r>
-              <a:rPr sz="2400" b="0">
-                <a:solidFill>
-                  <a:srgbClr val="080808"/>
-                </a:solidFill>
-                <a:latin typeface="Calibri"/>
-                <a:ea typeface="Calibri"/>
-                <a:cs typeface="Calibri"/>
-              </a:rPr>
-              <a:t> Test </a:t>
-            </a:r>
-            <a:r>
-              <a:rPr sz="2400" b="0">
-                <a:solidFill>
-                  <a:srgbClr val="067D17"/>
-                </a:solidFill>
-                <a:latin typeface="JetBrains Mono"/>
-                <a:ea typeface="JetBrains Mono"/>
-                <a:cs typeface="JetBrains Mono"/>
-              </a:rPr>
-              <a:t>"Sam"</a:t>
-            </a:r>
-            <a:r>
-              <a:rPr sz="2400" b="0">
-                <a:solidFill>
-                  <a:srgbClr val="080808"/>
-                </a:solidFill>
-                <a:latin typeface="Calibri"/>
-                <a:ea typeface="Calibri"/>
-                <a:cs typeface="Calibri"/>
-              </a:rPr>
-              <a:t> and </a:t>
-            </a:r>
-            <a:r>
-              <a:rPr sz="2400" b="0">
-                <a:solidFill>
-                  <a:srgbClr val="067D17"/>
-                </a:solidFill>
-                <a:latin typeface="JetBrains Mono"/>
-                <a:ea typeface="JetBrains Mono"/>
-                <a:cs typeface="JetBrains Mono"/>
-              </a:rPr>
-              <a:t>"read"</a:t>
-            </a:r>
-            <a:r>
-              <a:rPr sz="2400" b="0">
-                <a:solidFill>
-                  <a:srgbClr val="080808"/>
-                </a:solidFill>
-                <a:latin typeface="Calibri"/>
-                <a:ea typeface="Calibri"/>
-                <a:cs typeface="Calibri"/>
-              </a:rPr>
-              <a:t>; display </a:t>
-            </a:r>
-            <a:r>
-              <a:rPr sz="2400" b="0">
-                <a:solidFill>
-                  <a:srgbClr val="067D17"/>
-                </a:solidFill>
-                <a:latin typeface="JetBrains Mono"/>
-                <a:ea typeface="JetBrains Mono"/>
-                <a:cs typeface="JetBrains Mono"/>
-              </a:rPr>
-              <a:t>"Sam reads a book at home."</a:t>
+              <a:t>"Sam takes a walk in the park."</a:t>
             </a:r>
           </a:p>
         </p:txBody>
@@ -8608,7 +8449,7 @@
                 <a:ea typeface="JetBrains Mono"/>
                 <a:cs typeface="JetBrains Mono"/>
               </a:rPr>
-              <a:t>"Choose cycle or read: "</a:t>
+              <a:t>"Choose walk or read: "</a:t>
             </a:r>
             <a:r>
               <a:rPr sz="1600">
@@ -8621,16 +8462,6 @@
               </a:rPr>
               <a:t>)</a:t>
             </a:r>
-            <a:br>
-              <a:rPr sz="1600">
-                <a:solidFill>
-                  <a:srgbClr val="080808"/>
-                </a:solidFill>
-                <a:latin typeface="JetBrains Mono"/>
-                <a:ea typeface="JetBrains Mono"/>
-                <a:cs typeface="JetBrains Mono"/>
-              </a:rPr>
-            </a:br>
             <a:br>
               <a:rPr sz="1600">
                 <a:solidFill>
@@ -8694,7 +8525,7 @@
                 <a:ea typeface="JetBrains Mono"/>
                 <a:cs typeface="JetBrains Mono"/>
               </a:rPr>
-              <a:t>"cycle"</a:t>
+              <a:t>"walk"</a:t>
             </a:r>
             <a:r>
               <a:rPr sz="1600">
@@ -8759,7 +8590,7 @@
                 <a:ea typeface="JetBrains Mono"/>
                 <a:cs typeface="JetBrains Mono"/>
               </a:rPr>
-              <a:t>"Ride a bike in the park."</a:t>
+              <a:t>"Take a walk in the park."</a:t>
             </a:r>
             <a:r>
               <a:rPr sz="1600">
@@ -8971,18 +8802,21 @@
                 <a:ea typeface="Calibri"/>
                 <a:cs typeface="Calibri"/>
               </a:rPr>
-              <a:t>Ask </a:t>
-            </a:r>
-            <a:r>
-              <a:rPr sz="2400" b="0">
-                <a:solidFill>
-                  <a:srgbClr val="067D17"/>
-                </a:solidFill>
-                <a:latin typeface="JetBrains Mono"/>
-                <a:ea typeface="JetBrains Mono"/>
-                <a:cs typeface="JetBrains Mono"/>
-              </a:rPr>
-              <a:t>"Do you want tea?"</a:t>
+              <a:t>Create a program that asks two friends for their favourite colour and stores the answers in </a:t>
+            </a:r>
+            <a:r>
+              <a:rPr sz="2050" b="0">
+                <a:solidFill>
+                  <a:srgbClr val="6A1B9A"/>
+                </a:solidFill>
+                <a:highlight>
+                  <a:srgbClr val="ECEAF4"/>
+                </a:highlight>
+                <a:latin typeface="JetBrains Mono"/>
+                <a:ea typeface="JetBrains Mono"/>
+                <a:cs typeface="JetBrains Mono"/>
+              </a:rPr>
+              <a:t> colour_1 </a:t>
             </a:r>
             <a:r>
               <a:rPr sz="2400" b="0">
@@ -8993,18 +8827,21 @@
                 <a:ea typeface="Calibri"/>
                 <a:cs typeface="Calibri"/>
               </a:rPr>
-              <a:t> and store the answer in [answer]. Use </a:t>
-            </a:r>
-            <a:r>
-              <a:rPr sz="2400" b="0">
-                <a:solidFill>
-                  <a:srgbClr val="1750EB"/>
-                </a:solidFill>
-                <a:latin typeface="JetBrains Mono"/>
-                <a:ea typeface="JetBrains Mono"/>
-                <a:cs typeface="JetBrains Mono"/>
-              </a:rPr>
-              <a:t>if</a:t>
+              <a:t> and </a:t>
+            </a:r>
+            <a:r>
+              <a:rPr sz="2050" b="0">
+                <a:solidFill>
+                  <a:srgbClr val="6A1B9A"/>
+                </a:solidFill>
+                <a:highlight>
+                  <a:srgbClr val="ECEAF4"/>
+                </a:highlight>
+                <a:latin typeface="JetBrains Mono"/>
+                <a:ea typeface="JetBrains Mono"/>
+                <a:cs typeface="JetBrains Mono"/>
+              </a:rPr>
+              <a:t> colour_2 </a:t>
             </a:r>
             <a:r>
               <a:rPr sz="2400" b="0">
@@ -9015,10 +8852,10 @@
                 <a:ea typeface="Calibri"/>
                 <a:cs typeface="Calibri"/>
               </a:rPr>
-              <a:t> and </a:t>
-            </a:r>
-            <a:r>
-              <a:rPr sz="2400" b="0">
+              <a:t>. Use an </a:t>
+            </a:r>
+            <a:r>
+              <a:rPr sz="2050" b="0">
                 <a:solidFill>
                   <a:srgbClr val="1750EB"/>
                 </a:solidFill>
@@ -9026,7 +8863,7 @@
                 <a:ea typeface="JetBrains Mono"/>
                 <a:cs typeface="JetBrains Mono"/>
               </a:rPr>
-              <a:t>else</a:t>
+              <a:t>if</a:t>
             </a:r>
             <a:r>
               <a:rPr sz="2400" b="0">
@@ -9037,10 +8874,10 @@
                 <a:ea typeface="Calibri"/>
                 <a:cs typeface="Calibri"/>
               </a:rPr>
-              <a:t> so </a:t>
-            </a:r>
-            <a:r>
-              <a:rPr sz="2400" b="0">
+              <a:t> statement to compare them. Display </a:t>
+            </a:r>
+            <a:r>
+              <a:rPr sz="2050" b="0">
                 <a:solidFill>
                   <a:srgbClr val="067D17"/>
                 </a:solidFill>
@@ -9048,7 +8885,7 @@
                 <a:ea typeface="JetBrains Mono"/>
                 <a:cs typeface="JetBrains Mono"/>
               </a:rPr>
-              <a:t>"yes"</a:t>
+              <a:t>"You match!"</a:t>
             </a:r>
             <a:r>
               <a:rPr sz="2400" b="0">
@@ -9059,10 +8896,10 @@
                 <a:ea typeface="Calibri"/>
                 <a:cs typeface="Calibri"/>
               </a:rPr>
-              <a:t> displays </a:t>
-            </a:r>
-            <a:r>
-              <a:rPr sz="2400" b="0">
+              <a:t> if they are the same; otherwise display </a:t>
+            </a:r>
+            <a:r>
+              <a:rPr sz="2050" b="0">
                 <a:solidFill>
                   <a:srgbClr val="067D17"/>
                 </a:solidFill>
@@ -9070,117 +8907,7 @@
                 <a:ea typeface="JetBrains Mono"/>
                 <a:cs typeface="JetBrains Mono"/>
               </a:rPr>
-              <a:t>"Tea is ready."</a:t>
-            </a:r>
-            <a:r>
-              <a:rPr sz="2400" b="0">
-                <a:solidFill>
-                  <a:srgbClr val="080808"/>
-                </a:solidFill>
-                <a:latin typeface="Calibri"/>
-                <a:ea typeface="Calibri"/>
-                <a:cs typeface="Calibri"/>
-              </a:rPr>
-              <a:t> and every other answer displays </a:t>
-            </a:r>
-            <a:r>
-              <a:rPr sz="2400" b="0">
-                <a:solidFill>
-                  <a:srgbClr val="067D17"/>
-                </a:solidFill>
-                <a:latin typeface="JetBrains Mono"/>
-                <a:ea typeface="JetBrains Mono"/>
-                <a:cs typeface="JetBrains Mono"/>
-              </a:rPr>
-              <a:t>"Choose another drink."</a:t>
-            </a:r>
-            <a:r>
-              <a:rPr sz="2400" b="0">
-                <a:solidFill>
-                  <a:srgbClr val="080808"/>
-                </a:solidFill>
-                <a:latin typeface="Calibri"/>
-                <a:ea typeface="Calibri"/>
-                <a:cs typeface="Calibri"/>
-              </a:rPr>
-              <a:t> Test </a:t>
-            </a:r>
-            <a:r>
-              <a:rPr sz="2400" b="0">
-                <a:solidFill>
-                  <a:srgbClr val="067D17"/>
-                </a:solidFill>
-                <a:latin typeface="JetBrains Mono"/>
-                <a:ea typeface="JetBrains Mono"/>
-                <a:cs typeface="JetBrains Mono"/>
-              </a:rPr>
-              <a:t>"yes"</a:t>
-            </a:r>
-            <a:r>
-              <a:rPr sz="2400" b="0">
-                <a:solidFill>
-                  <a:srgbClr val="080808"/>
-                </a:solidFill>
-                <a:latin typeface="Calibri"/>
-                <a:ea typeface="Calibri"/>
-                <a:cs typeface="Calibri"/>
-              </a:rPr>
-              <a:t>; display </a:t>
-            </a:r>
-            <a:r>
-              <a:rPr sz="2400" b="0">
-                <a:solidFill>
-                  <a:srgbClr val="067D17"/>
-                </a:solidFill>
-                <a:latin typeface="JetBrains Mono"/>
-                <a:ea typeface="JetBrains Mono"/>
-                <a:cs typeface="JetBrains Mono"/>
-              </a:rPr>
-              <a:t>"Tea is ready."</a:t>
-            </a:r>
-            <a:r>
-              <a:rPr sz="2400" b="0">
-                <a:solidFill>
-                  <a:srgbClr val="080808"/>
-                </a:solidFill>
-                <a:latin typeface="Calibri"/>
-                <a:ea typeface="Calibri"/>
-                <a:cs typeface="Calibri"/>
-              </a:rPr>
-              <a:t> Test </a:t>
-            </a:r>
-            <a:r>
-              <a:rPr sz="2400" b="0">
-                <a:solidFill>
-                  <a:srgbClr val="067D17"/>
-                </a:solidFill>
-                <a:latin typeface="JetBrains Mono"/>
-                <a:ea typeface="JetBrains Mono"/>
-                <a:cs typeface="JetBrains Mono"/>
-              </a:rPr>
-              <a:t>"no"</a:t>
-            </a:r>
-            <a:r>
-              <a:rPr sz="2400" b="0">
-                <a:solidFill>
-                  <a:srgbClr val="080808"/>
-                </a:solidFill>
-                <a:latin typeface="Calibri"/>
-                <a:ea typeface="Calibri"/>
-                <a:cs typeface="Calibri"/>
-              </a:rPr>
-              <a:t>; display </a:t>
-            </a:r>
-            <a:r>
-              <a:rPr sz="2400" b="0">
-                <a:solidFill>
-                  <a:srgbClr val="067D17"/>
-                </a:solidFill>
-                <a:latin typeface="JetBrains Mono"/>
-                <a:ea typeface="JetBrains Mono"/>
-                <a:cs typeface="JetBrains Mono"/>
-              </a:rPr>
-              <a:t>"Choose another drink."</a:t>
+              <a:t>"Different, but both great choices."</a:t>
             </a:r>
           </a:p>
         </p:txBody>

--- a/Mapped Curriculum Lessons/Grade 6/Lesson 04 - Decisions/Decisions - Slides.pptx
+++ b/Mapped Curriculum Lessons/Grade 6/Lesson 04 - Decisions/Decisions - Slides.pptx
@@ -2,28 +2,28 @@
 <file path=ppt/presentation.xml><?xml version="1.0" encoding="utf-8"?>
 <p:presentation xmlns:p="http://schemas.openxmlformats.org/presentationml/2006/main" embedTrueTypeFonts="1" saveSubsetFonts="0">
   <p:sldMasterIdLst>
-    <p:sldMasterId xmlns:r="http://schemas.openxmlformats.org/officeDocument/2006/relationships" id="2147483648" r:id="Ra49058899bbf4668"/>
+    <p:sldMasterId xmlns:r="http://schemas.openxmlformats.org/officeDocument/2006/relationships" id="2147483648" r:id="Rf82f9ad8c6b04f74"/>
   </p:sldMasterIdLst>
   <p:notesMasterIdLst>
-    <p:notesMasterId xmlns:r="http://schemas.openxmlformats.org/officeDocument/2006/relationships" r:id="Rffc1c6efbcb44709"/>
+    <p:notesMasterId xmlns:r="http://schemas.openxmlformats.org/officeDocument/2006/relationships" r:id="R0863fa843b04442d"/>
   </p:notesMasterIdLst>
   <p:sldIdLst>
-    <p:sldId xmlns:r="http://schemas.openxmlformats.org/officeDocument/2006/relationships" id="256" r:id="R10ef252e7b0140fe"/>
-    <p:sldId xmlns:r="http://schemas.openxmlformats.org/officeDocument/2006/relationships" id="257" r:id="R621f2cc1e342469f"/>
-    <p:sldId xmlns:r="http://schemas.openxmlformats.org/officeDocument/2006/relationships" id="258" r:id="Re045bdbdc72b4ad0"/>
-    <p:sldId xmlns:r="http://schemas.openxmlformats.org/officeDocument/2006/relationships" id="259" r:id="R20f1052699334893"/>
-    <p:sldId xmlns:r="http://schemas.openxmlformats.org/officeDocument/2006/relationships" id="260" r:id="Rf43bc290eee14fc4"/>
-    <p:sldId xmlns:r="http://schemas.openxmlformats.org/officeDocument/2006/relationships" id="261" r:id="R0f36d9f118eb4fac"/>
-    <p:sldId xmlns:r="http://schemas.openxmlformats.org/officeDocument/2006/relationships" id="262" r:id="Rec8d40649cec4cde"/>
-    <p:sldId xmlns:r="http://schemas.openxmlformats.org/officeDocument/2006/relationships" id="263" r:id="R09b55aa7e9224f21"/>
-    <p:sldId xmlns:r="http://schemas.openxmlformats.org/officeDocument/2006/relationships" id="264" r:id="R3b1c485e52694bc8"/>
+    <p:sldId xmlns:r="http://schemas.openxmlformats.org/officeDocument/2006/relationships" id="256" r:id="Rd01dfcb637b44d6e"/>
+    <p:sldId xmlns:r="http://schemas.openxmlformats.org/officeDocument/2006/relationships" id="257" r:id="R90330be9dda34bdf"/>
+    <p:sldId xmlns:r="http://schemas.openxmlformats.org/officeDocument/2006/relationships" id="258" r:id="R2aea9cbe91164bbe"/>
+    <p:sldId xmlns:r="http://schemas.openxmlformats.org/officeDocument/2006/relationships" id="259" r:id="Rb9f326fe38c648e1"/>
+    <p:sldId xmlns:r="http://schemas.openxmlformats.org/officeDocument/2006/relationships" id="260" r:id="Rf50c98c474d14db4"/>
+    <p:sldId xmlns:r="http://schemas.openxmlformats.org/officeDocument/2006/relationships" id="261" r:id="Redff20ff52ad4f39"/>
+    <p:sldId xmlns:r="http://schemas.openxmlformats.org/officeDocument/2006/relationships" id="262" r:id="R899e97b07f8643f4"/>
+    <p:sldId xmlns:r="http://schemas.openxmlformats.org/officeDocument/2006/relationships" id="263" r:id="R4625afc608364e96"/>
+    <p:sldId xmlns:r="http://schemas.openxmlformats.org/officeDocument/2006/relationships" id="264" r:id="R719b8fc317ea4efa"/>
   </p:sldIdLst>
   <p:sldSz cx="12192000" cy="6858000"/>
   <p:notesSz cx="6858000" cy="9144000"/>
   <p:embeddedFontLst>
     <p:embeddedFont>
       <p:font typeface="JetBrains Mono"/>
-      <p:regular xmlns:r="http://schemas.openxmlformats.org/officeDocument/2006/relationships" r:id="Rea81bee1d83f4266"/>
+      <p:regular xmlns:r="http://schemas.openxmlformats.org/officeDocument/2006/relationships" r:id="Rac3853e63bed4605"/>
     </p:embeddedFont>
   </p:embeddedFontLst>
 </p:presentation>
@@ -1071,7 +1071,7 @@
           <p:nvPr/>
         </p:nvPicPr>
         <p:blipFill rotWithShape="1">
-          <a:blip xmlns:r="http://schemas.openxmlformats.org/officeDocument/2006/relationships" xmlns:a="http://schemas.openxmlformats.org/drawingml/2006/main" r:embed="R2a1b71966cfa4559"/>
+          <a:blip xmlns:r="http://schemas.openxmlformats.org/officeDocument/2006/relationships" xmlns:a="http://schemas.openxmlformats.org/drawingml/2006/main" r:embed="R0f0c7f27bece4887"/>
           <a:stretch xmlns:a="http://schemas.openxmlformats.org/drawingml/2006/main"/>
         </p:blipFill>
         <p:spPr>
@@ -1451,7 +1451,7 @@
           <p:nvPr/>
         </p:nvPicPr>
         <p:blipFill rotWithShape="1">
-          <a:blip xmlns:r="http://schemas.openxmlformats.org/officeDocument/2006/relationships" xmlns:a="http://schemas.openxmlformats.org/drawingml/2006/main" r:embed="Rc4a52261eeb64e85">
+          <a:blip xmlns:r="http://schemas.openxmlformats.org/officeDocument/2006/relationships" xmlns:a="http://schemas.openxmlformats.org/drawingml/2006/main" r:embed="R3bc2c8a44270480b">
             <a:alphaModFix amt="28000"/>
           </a:blip>
           <a:stretch xmlns:a="http://schemas.openxmlformats.org/drawingml/2006/main"/>
@@ -1664,7 +1664,7 @@
           <p:nvPr/>
         </p:nvPicPr>
         <p:blipFill rotWithShape="1">
-          <a:blip xmlns:r="http://schemas.openxmlformats.org/officeDocument/2006/relationships" xmlns:a="http://schemas.openxmlformats.org/drawingml/2006/main" r:embed="R3770906b612746af">
+          <a:blip xmlns:r="http://schemas.openxmlformats.org/officeDocument/2006/relationships" xmlns:a="http://schemas.openxmlformats.org/drawingml/2006/main" r:embed="R4ea3b2ceda7c43df">
             <a:alphaModFix amt="28000"/>
           </a:blip>
           <a:stretch xmlns:a="http://schemas.openxmlformats.org/drawingml/2006/main"/>
@@ -1899,7 +1899,7 @@
           <p:nvPr/>
         </p:nvPicPr>
         <p:blipFill rotWithShape="1">
-          <a:blip xmlns:r="http://schemas.openxmlformats.org/officeDocument/2006/relationships" xmlns:a="http://schemas.openxmlformats.org/drawingml/2006/main" r:embed="R395e297911c343f4">
+          <a:blip xmlns:r="http://schemas.openxmlformats.org/officeDocument/2006/relationships" xmlns:a="http://schemas.openxmlformats.org/drawingml/2006/main" r:embed="R957501035f4e44c8">
             <a:alphaModFix amt="28000"/>
           </a:blip>
           <a:stretch xmlns:a="http://schemas.openxmlformats.org/drawingml/2006/main"/>
@@ -2176,7 +2176,7 @@
           <p:nvPr/>
         </p:nvPicPr>
         <p:blipFill rotWithShape="1">
-          <a:blip xmlns:r="http://schemas.openxmlformats.org/officeDocument/2006/relationships" xmlns:a="http://schemas.openxmlformats.org/drawingml/2006/main" r:embed="Rddec2093c83c4fa7">
+          <a:blip xmlns:r="http://schemas.openxmlformats.org/officeDocument/2006/relationships" xmlns:a="http://schemas.openxmlformats.org/drawingml/2006/main" r:embed="R4b97cecf201547d7">
             <a:alphaModFix amt="28000"/>
           </a:blip>
           <a:stretch xmlns:a="http://schemas.openxmlformats.org/drawingml/2006/main"/>
@@ -2451,7 +2451,7 @@
           <p:nvPr/>
         </p:nvPicPr>
         <p:blipFill rotWithShape="1">
-          <a:blip xmlns:r="http://schemas.openxmlformats.org/officeDocument/2006/relationships" xmlns:a="http://schemas.openxmlformats.org/drawingml/2006/main" r:embed="R00634f5a3bec435c">
+          <a:blip xmlns:r="http://schemas.openxmlformats.org/officeDocument/2006/relationships" xmlns:a="http://schemas.openxmlformats.org/drawingml/2006/main" r:embed="R49f5f9446daf4ed0">
             <a:alphaModFix amt="28000"/>
           </a:blip>
           <a:stretch xmlns:a="http://schemas.openxmlformats.org/drawingml/2006/main"/>
@@ -2875,7 +2875,7 @@
           <p:nvPr/>
         </p:nvPicPr>
         <p:blipFill rotWithShape="1">
-          <a:blip xmlns:r="http://schemas.openxmlformats.org/officeDocument/2006/relationships" xmlns:a="http://schemas.openxmlformats.org/drawingml/2006/main" r:embed="R1c3d4826329948f4">
+          <a:blip xmlns:r="http://schemas.openxmlformats.org/officeDocument/2006/relationships" xmlns:a="http://schemas.openxmlformats.org/drawingml/2006/main" r:embed="R45fa4f8ff20a442e">
             <a:alphaModFix amt="28000"/>
           </a:blip>
           <a:stretch xmlns:a="http://schemas.openxmlformats.org/drawingml/2006/main"/>
@@ -3016,7 +3016,7 @@
           <p:nvPr/>
         </p:nvPicPr>
         <p:blipFill rotWithShape="1">
-          <a:blip xmlns:r="http://schemas.openxmlformats.org/officeDocument/2006/relationships" xmlns:a="http://schemas.openxmlformats.org/drawingml/2006/main" r:embed="R3fc5d66dd77141cc">
+          <a:blip xmlns:r="http://schemas.openxmlformats.org/officeDocument/2006/relationships" xmlns:a="http://schemas.openxmlformats.org/drawingml/2006/main" r:embed="Rd25cf624c2324b21">
             <a:alphaModFix amt="28000"/>
           </a:blip>
           <a:stretch xmlns:a="http://schemas.openxmlformats.org/drawingml/2006/main"/>
@@ -3130,7 +3130,7 @@
           <p:nvPr/>
         </p:nvPicPr>
         <p:blipFill rotWithShape="1">
-          <a:blip xmlns:r="http://schemas.openxmlformats.org/officeDocument/2006/relationships" xmlns:a="http://schemas.openxmlformats.org/drawingml/2006/main" r:embed="R15f0bc73e7e84936">
+          <a:blip xmlns:r="http://schemas.openxmlformats.org/officeDocument/2006/relationships" xmlns:a="http://schemas.openxmlformats.org/drawingml/2006/main" r:embed="R2115cad081cd4168">
             <a:alphaModFix amt="28000"/>
           </a:blip>
           <a:stretch xmlns:a="http://schemas.openxmlformats.org/drawingml/2006/main"/>
@@ -3457,7 +3457,7 @@
           <p:nvPr/>
         </p:nvPicPr>
         <p:blipFill rotWithShape="1">
-          <a:blip xmlns:r="http://schemas.openxmlformats.org/officeDocument/2006/relationships" xmlns:a="http://schemas.openxmlformats.org/drawingml/2006/main" r:embed="R98bfa4912763433a">
+          <a:blip xmlns:r="http://schemas.openxmlformats.org/officeDocument/2006/relationships" xmlns:a="http://schemas.openxmlformats.org/drawingml/2006/main" r:embed="Rbc72c04481d24012">
             <a:alphaModFix amt="28000"/>
           </a:blip>
           <a:stretch xmlns:a="http://schemas.openxmlformats.org/drawingml/2006/main"/>
@@ -3745,7 +3745,7 @@
           <p:nvPr/>
         </p:nvPicPr>
         <p:blipFill rotWithShape="1">
-          <a:blip xmlns:r="http://schemas.openxmlformats.org/officeDocument/2006/relationships" xmlns:a="http://schemas.openxmlformats.org/drawingml/2006/main" r:embed="R679b309b7cf1477f">
+          <a:blip xmlns:r="http://schemas.openxmlformats.org/officeDocument/2006/relationships" xmlns:a="http://schemas.openxmlformats.org/drawingml/2006/main" r:embed="R135ce3e256564b53">
             <a:alphaModFix amt="28000"/>
           </a:blip>
           <a:stretch xmlns:a="http://schemas.openxmlformats.org/drawingml/2006/main"/>
@@ -3982,17 +3982,17 @@
   </p:cSld>
   <p:clrMap bg1="lt1" tx1="dk1" bg2="lt2" tx2="dk2" accent1="accent1" accent2="accent2" accent3="accent3" accent4="accent4" accent5="accent5" accent6="accent6" hlink="hlink" folHlink="folHlink"/>
   <p:sldLayoutIdLst>
-    <p:sldLayoutId xmlns:r="http://schemas.openxmlformats.org/officeDocument/2006/relationships" id="2147483649" r:id="Rd63cc376519e4da3"/>
-    <p:sldLayoutId xmlns:r="http://schemas.openxmlformats.org/officeDocument/2006/relationships" id="2147483650" r:id="R665e322d59dc4067"/>
-    <p:sldLayoutId xmlns:r="http://schemas.openxmlformats.org/officeDocument/2006/relationships" id="2147483651" r:id="Ra99b3d98316540d6"/>
-    <p:sldLayoutId xmlns:r="http://schemas.openxmlformats.org/officeDocument/2006/relationships" id="2147483652" r:id="R5d286a23e349499b"/>
-    <p:sldLayoutId xmlns:r="http://schemas.openxmlformats.org/officeDocument/2006/relationships" id="2147483653" r:id="R60787c27fa3f4650"/>
-    <p:sldLayoutId xmlns:r="http://schemas.openxmlformats.org/officeDocument/2006/relationships" id="2147483654" r:id="R8557ca9d22a6449c"/>
-    <p:sldLayoutId xmlns:r="http://schemas.openxmlformats.org/officeDocument/2006/relationships" id="2147483655" r:id="R15ce0c62ebcf457e"/>
-    <p:sldLayoutId xmlns:r="http://schemas.openxmlformats.org/officeDocument/2006/relationships" id="2147483656" r:id="R9163e4529d56430a"/>
-    <p:sldLayoutId xmlns:r="http://schemas.openxmlformats.org/officeDocument/2006/relationships" id="2147483657" r:id="R84917692d95a4fc9"/>
-    <p:sldLayoutId xmlns:r="http://schemas.openxmlformats.org/officeDocument/2006/relationships" id="2147483658" r:id="R012aa0a6c78d45f4"/>
-    <p:sldLayoutId xmlns:r="http://schemas.openxmlformats.org/officeDocument/2006/relationships" id="2147483659" r:id="Rc13ff63436ce4000"/>
+    <p:sldLayoutId xmlns:r="http://schemas.openxmlformats.org/officeDocument/2006/relationships" id="2147483649" r:id="Rd04ba1d8eb124579"/>
+    <p:sldLayoutId xmlns:r="http://schemas.openxmlformats.org/officeDocument/2006/relationships" id="2147483650" r:id="R156c27790a584853"/>
+    <p:sldLayoutId xmlns:r="http://schemas.openxmlformats.org/officeDocument/2006/relationships" id="2147483651" r:id="R0a00165a71784d5a"/>
+    <p:sldLayoutId xmlns:r="http://schemas.openxmlformats.org/officeDocument/2006/relationships" id="2147483652" r:id="Rd27b4d605ff544dd"/>
+    <p:sldLayoutId xmlns:r="http://schemas.openxmlformats.org/officeDocument/2006/relationships" id="2147483653" r:id="Rf6e1486245dd410f"/>
+    <p:sldLayoutId xmlns:r="http://schemas.openxmlformats.org/officeDocument/2006/relationships" id="2147483654" r:id="R4e8a974498fa47ee"/>
+    <p:sldLayoutId xmlns:r="http://schemas.openxmlformats.org/officeDocument/2006/relationships" id="2147483655" r:id="R8ae292caed6a4b23"/>
+    <p:sldLayoutId xmlns:r="http://schemas.openxmlformats.org/officeDocument/2006/relationships" id="2147483656" r:id="R2b8b4fb99ed542fa"/>
+    <p:sldLayoutId xmlns:r="http://schemas.openxmlformats.org/officeDocument/2006/relationships" id="2147483657" r:id="Rcfc57c4f7dab44c9"/>
+    <p:sldLayoutId xmlns:r="http://schemas.openxmlformats.org/officeDocument/2006/relationships" id="2147483658" r:id="R307aeba563fc43c1"/>
+    <p:sldLayoutId xmlns:r="http://schemas.openxmlformats.org/officeDocument/2006/relationships" id="2147483659" r:id="Rf46885684a3f4fb5"/>
   </p:sldLayoutIdLst>
   <p:hf hdr="0" ftr="0" dt="0"/>
   <p:txStyles>
@@ -4961,7 +4961,7 @@
             <a:r>
               <a:rPr sz="2400">
                 <a:solidFill>
-                  <a:srgbClr val="1750EB"/>
+                  <a:srgbClr val="C45E00"/>
                 </a:solidFill>
                 <a:latin typeface="JetBrains Mono"/>
                 <a:ea typeface="JetBrains Mono"/>
@@ -5098,7 +5098,7 @@
             <a:r>
               <a:rPr sz="2400">
                 <a:solidFill>
-                  <a:srgbClr val="1750EB"/>
+                  <a:srgbClr val="C45E00"/>
                 </a:solidFill>
                 <a:latin typeface="JetBrains Mono"/>
                 <a:ea typeface="JetBrains Mono"/>
@@ -5531,7 +5531,7 @@
             <a:r>
               <a:rPr sz="2400">
                 <a:solidFill>
-                  <a:srgbClr val="1750EB"/>
+                  <a:srgbClr val="C45E00"/>
                 </a:solidFill>
                 <a:latin typeface="JetBrains Mono"/>
                 <a:ea typeface="JetBrains Mono"/>
@@ -5668,7 +5668,7 @@
             <a:r>
               <a:rPr sz="2400">
                 <a:solidFill>
-                  <a:srgbClr val="1750EB"/>
+                  <a:srgbClr val="C45E00"/>
                 </a:solidFill>
                 <a:latin typeface="JetBrains Mono"/>
                 <a:ea typeface="JetBrains Mono"/>
@@ -6101,7 +6101,7 @@
             <a:r>
               <a:rPr sz="2400">
                 <a:solidFill>
-                  <a:srgbClr val="1750EB"/>
+                  <a:srgbClr val="C45E00"/>
                 </a:solidFill>
                 <a:latin typeface="JetBrains Mono"/>
                 <a:ea typeface="JetBrains Mono"/>
@@ -6238,7 +6238,7 @@
             <a:r>
               <a:rPr sz="2400">
                 <a:solidFill>
-                  <a:srgbClr val="1750EB"/>
+                  <a:srgbClr val="C45E00"/>
                 </a:solidFill>
                 <a:latin typeface="JetBrains Mono"/>
                 <a:ea typeface="JetBrains Mono"/>
@@ -6924,7 +6924,7 @@
             <a:r>
               <a:rPr sz="1600">
                 <a:solidFill>
-                  <a:srgbClr val="1750EB"/>
+                  <a:srgbClr val="C45E00"/>
                 </a:solidFill>
                 <a:latin typeface="JetBrains Mono"/>
                 <a:ea typeface="JetBrains Mono"/>
@@ -7065,7 +7065,7 @@
             <a:r>
               <a:rPr sz="1600">
                 <a:solidFill>
-                  <a:srgbClr val="1750EB"/>
+                  <a:srgbClr val="C45E00"/>
                 </a:solidFill>
                 <a:latin typeface="JetBrains Mono"/>
                 <a:ea typeface="JetBrains Mono"/>
@@ -7256,7 +7256,7 @@
             <a:r>
               <a:rPr sz="2050" b="0">
                 <a:solidFill>
-                  <a:srgbClr val="1750EB"/>
+                  <a:srgbClr val="C45E00"/>
                 </a:solidFill>
                 <a:latin typeface="JetBrains Mono"/>
                 <a:ea typeface="JetBrains Mono"/>
@@ -7702,7 +7702,7 @@
             <a:r>
               <a:rPr sz="1600">
                 <a:solidFill>
-                  <a:srgbClr val="1750EB"/>
+                  <a:srgbClr val="C45E00"/>
                 </a:solidFill>
                 <a:latin typeface="JetBrains Mono"/>
                 <a:ea typeface="JetBrains Mono"/>
@@ -7843,7 +7843,7 @@
             <a:r>
               <a:rPr sz="1600">
                 <a:solidFill>
-                  <a:srgbClr val="1750EB"/>
+                  <a:srgbClr val="C45E00"/>
                 </a:solidFill>
                 <a:latin typeface="JetBrains Mono"/>
                 <a:ea typeface="JetBrains Mono"/>
@@ -8475,7 +8475,7 @@
             <a:r>
               <a:rPr sz="1600">
                 <a:solidFill>
-                  <a:srgbClr val="1750EB"/>
+                  <a:srgbClr val="C45E00"/>
                 </a:solidFill>
                 <a:latin typeface="JetBrains Mono"/>
                 <a:ea typeface="JetBrains Mono"/>
@@ -8616,7 +8616,7 @@
             <a:r>
               <a:rPr sz="1600">
                 <a:solidFill>
-                  <a:srgbClr val="1750EB"/>
+                  <a:srgbClr val="C45E00"/>
                 </a:solidFill>
                 <a:latin typeface="JetBrains Mono"/>
                 <a:ea typeface="JetBrains Mono"/>
@@ -8857,7 +8857,7 @@
             <a:r>
               <a:rPr sz="2050" b="0">
                 <a:solidFill>
-                  <a:srgbClr val="1750EB"/>
+                  <a:srgbClr val="C45E00"/>
                 </a:solidFill>
                 <a:latin typeface="JetBrains Mono"/>
                 <a:ea typeface="JetBrains Mono"/>
@@ -9248,7 +9248,7 @@
             <a:r>
               <a:rPr sz="1600">
                 <a:solidFill>
-                  <a:srgbClr val="1750EB"/>
+                  <a:srgbClr val="C45E00"/>
                 </a:solidFill>
                 <a:latin typeface="JetBrains Mono"/>
                 <a:ea typeface="JetBrains Mono"/>
@@ -9389,7 +9389,7 @@
             <a:r>
               <a:rPr sz="1600">
                 <a:solidFill>
-                  <a:srgbClr val="1750EB"/>
+                  <a:srgbClr val="C45E00"/>
                 </a:solidFill>
                 <a:latin typeface="JetBrains Mono"/>
                 <a:ea typeface="JetBrains Mono"/>
@@ -9672,7 +9672,7 @@
             <a:r>
               <a:rPr sz="1800">
                 <a:solidFill>
-                  <a:srgbClr val="1750EB"/>
+                  <a:srgbClr val="C45E00"/>
                 </a:solidFill>
                 <a:latin typeface="JetBrains Mono"/>
                 <a:ea typeface="JetBrains Mono"/>
@@ -9809,7 +9809,7 @@
             <a:r>
               <a:rPr sz="1800">
                 <a:solidFill>
-                  <a:srgbClr val="1750EB"/>
+                  <a:srgbClr val="C45E00"/>
                 </a:solidFill>
                 <a:latin typeface="JetBrains Mono"/>
                 <a:ea typeface="JetBrains Mono"/>

--- a/Mapped Curriculum Lessons/Grade 6/Lesson 04 - Decisions/Decisions - Slides.pptx
+++ b/Mapped Curriculum Lessons/Grade 6/Lesson 04 - Decisions/Decisions - Slides.pptx
@@ -2,28 +2,28 @@
 <file path=ppt/presentation.xml><?xml version="1.0" encoding="utf-8"?>
 <p:presentation xmlns:p="http://schemas.openxmlformats.org/presentationml/2006/main" embedTrueTypeFonts="1" saveSubsetFonts="0">
   <p:sldMasterIdLst>
-    <p:sldMasterId xmlns:r="http://schemas.openxmlformats.org/officeDocument/2006/relationships" id="2147483648" r:id="Rf82f9ad8c6b04f74"/>
+    <p:sldMasterId xmlns:r="http://schemas.openxmlformats.org/officeDocument/2006/relationships" id="2147483648" r:id="Rc1c548d078004890"/>
   </p:sldMasterIdLst>
   <p:notesMasterIdLst>
-    <p:notesMasterId xmlns:r="http://schemas.openxmlformats.org/officeDocument/2006/relationships" r:id="R0863fa843b04442d"/>
+    <p:notesMasterId xmlns:r="http://schemas.openxmlformats.org/officeDocument/2006/relationships" r:id="R4859f0e208574960"/>
   </p:notesMasterIdLst>
   <p:sldIdLst>
-    <p:sldId xmlns:r="http://schemas.openxmlformats.org/officeDocument/2006/relationships" id="256" r:id="Rd01dfcb637b44d6e"/>
-    <p:sldId xmlns:r="http://schemas.openxmlformats.org/officeDocument/2006/relationships" id="257" r:id="R90330be9dda34bdf"/>
-    <p:sldId xmlns:r="http://schemas.openxmlformats.org/officeDocument/2006/relationships" id="258" r:id="R2aea9cbe91164bbe"/>
-    <p:sldId xmlns:r="http://schemas.openxmlformats.org/officeDocument/2006/relationships" id="259" r:id="Rb9f326fe38c648e1"/>
-    <p:sldId xmlns:r="http://schemas.openxmlformats.org/officeDocument/2006/relationships" id="260" r:id="Rf50c98c474d14db4"/>
-    <p:sldId xmlns:r="http://schemas.openxmlformats.org/officeDocument/2006/relationships" id="261" r:id="Redff20ff52ad4f39"/>
-    <p:sldId xmlns:r="http://schemas.openxmlformats.org/officeDocument/2006/relationships" id="262" r:id="R899e97b07f8643f4"/>
-    <p:sldId xmlns:r="http://schemas.openxmlformats.org/officeDocument/2006/relationships" id="263" r:id="R4625afc608364e96"/>
-    <p:sldId xmlns:r="http://schemas.openxmlformats.org/officeDocument/2006/relationships" id="264" r:id="R719b8fc317ea4efa"/>
+    <p:sldId xmlns:r="http://schemas.openxmlformats.org/officeDocument/2006/relationships" id="256" r:id="Re32879e109204885"/>
+    <p:sldId xmlns:r="http://schemas.openxmlformats.org/officeDocument/2006/relationships" id="257" r:id="Reec4d9f66c654803"/>
+    <p:sldId xmlns:r="http://schemas.openxmlformats.org/officeDocument/2006/relationships" id="258" r:id="Rd7707083a23747a0"/>
+    <p:sldId xmlns:r="http://schemas.openxmlformats.org/officeDocument/2006/relationships" id="259" r:id="Rf4d355711e754358"/>
+    <p:sldId xmlns:r="http://schemas.openxmlformats.org/officeDocument/2006/relationships" id="260" r:id="Rc27dd664c8064118"/>
+    <p:sldId xmlns:r="http://schemas.openxmlformats.org/officeDocument/2006/relationships" id="261" r:id="Rdae52104226a43d8"/>
+    <p:sldId xmlns:r="http://schemas.openxmlformats.org/officeDocument/2006/relationships" id="262" r:id="Rb7001109c4894e02"/>
+    <p:sldId xmlns:r="http://schemas.openxmlformats.org/officeDocument/2006/relationships" id="263" r:id="R597927a8a9cf4891"/>
+    <p:sldId xmlns:r="http://schemas.openxmlformats.org/officeDocument/2006/relationships" id="264" r:id="Ree7d33caf15e49a5"/>
   </p:sldIdLst>
   <p:sldSz cx="12192000" cy="6858000"/>
   <p:notesSz cx="6858000" cy="9144000"/>
   <p:embeddedFontLst>
     <p:embeddedFont>
       <p:font typeface="JetBrains Mono"/>
-      <p:regular xmlns:r="http://schemas.openxmlformats.org/officeDocument/2006/relationships" r:id="Rac3853e63bed4605"/>
+      <p:regular xmlns:r="http://schemas.openxmlformats.org/officeDocument/2006/relationships" r:id="Rdee370abf5e341b1"/>
     </p:embeddedFont>
   </p:embeddedFontLst>
 </p:presentation>
@@ -1071,7 +1071,7 @@
           <p:nvPr/>
         </p:nvPicPr>
         <p:blipFill rotWithShape="1">
-          <a:blip xmlns:r="http://schemas.openxmlformats.org/officeDocument/2006/relationships" xmlns:a="http://schemas.openxmlformats.org/drawingml/2006/main" r:embed="R0f0c7f27bece4887"/>
+          <a:blip xmlns:r="http://schemas.openxmlformats.org/officeDocument/2006/relationships" xmlns:a="http://schemas.openxmlformats.org/drawingml/2006/main" r:embed="R517fc03637654012"/>
           <a:stretch xmlns:a="http://schemas.openxmlformats.org/drawingml/2006/main"/>
         </p:blipFill>
         <p:spPr>
@@ -1451,7 +1451,7 @@
           <p:nvPr/>
         </p:nvPicPr>
         <p:blipFill rotWithShape="1">
-          <a:blip xmlns:r="http://schemas.openxmlformats.org/officeDocument/2006/relationships" xmlns:a="http://schemas.openxmlformats.org/drawingml/2006/main" r:embed="R3bc2c8a44270480b">
+          <a:blip xmlns:r="http://schemas.openxmlformats.org/officeDocument/2006/relationships" xmlns:a="http://schemas.openxmlformats.org/drawingml/2006/main" r:embed="Rcabd9d0b45464d5d">
             <a:alphaModFix amt="28000"/>
           </a:blip>
           <a:stretch xmlns:a="http://schemas.openxmlformats.org/drawingml/2006/main"/>
@@ -1664,7 +1664,7 @@
           <p:nvPr/>
         </p:nvPicPr>
         <p:blipFill rotWithShape="1">
-          <a:blip xmlns:r="http://schemas.openxmlformats.org/officeDocument/2006/relationships" xmlns:a="http://schemas.openxmlformats.org/drawingml/2006/main" r:embed="R4ea3b2ceda7c43df">
+          <a:blip xmlns:r="http://schemas.openxmlformats.org/officeDocument/2006/relationships" xmlns:a="http://schemas.openxmlformats.org/drawingml/2006/main" r:embed="R014b29c3dd6d439d">
             <a:alphaModFix amt="28000"/>
           </a:blip>
           <a:stretch xmlns:a="http://schemas.openxmlformats.org/drawingml/2006/main"/>
@@ -1899,7 +1899,7 @@
           <p:nvPr/>
         </p:nvPicPr>
         <p:blipFill rotWithShape="1">
-          <a:blip xmlns:r="http://schemas.openxmlformats.org/officeDocument/2006/relationships" xmlns:a="http://schemas.openxmlformats.org/drawingml/2006/main" r:embed="R957501035f4e44c8">
+          <a:blip xmlns:r="http://schemas.openxmlformats.org/officeDocument/2006/relationships" xmlns:a="http://schemas.openxmlformats.org/drawingml/2006/main" r:embed="R0765d3d37c394226">
             <a:alphaModFix amt="28000"/>
           </a:blip>
           <a:stretch xmlns:a="http://schemas.openxmlformats.org/drawingml/2006/main"/>
@@ -2176,7 +2176,7 @@
           <p:nvPr/>
         </p:nvPicPr>
         <p:blipFill rotWithShape="1">
-          <a:blip xmlns:r="http://schemas.openxmlformats.org/officeDocument/2006/relationships" xmlns:a="http://schemas.openxmlformats.org/drawingml/2006/main" r:embed="R4b97cecf201547d7">
+          <a:blip xmlns:r="http://schemas.openxmlformats.org/officeDocument/2006/relationships" xmlns:a="http://schemas.openxmlformats.org/drawingml/2006/main" r:embed="R85d1b514d1ce4207">
             <a:alphaModFix amt="28000"/>
           </a:blip>
           <a:stretch xmlns:a="http://schemas.openxmlformats.org/drawingml/2006/main"/>
@@ -2451,7 +2451,7 @@
           <p:nvPr/>
         </p:nvPicPr>
         <p:blipFill rotWithShape="1">
-          <a:blip xmlns:r="http://schemas.openxmlformats.org/officeDocument/2006/relationships" xmlns:a="http://schemas.openxmlformats.org/drawingml/2006/main" r:embed="R49f5f9446daf4ed0">
+          <a:blip xmlns:r="http://schemas.openxmlformats.org/officeDocument/2006/relationships" xmlns:a="http://schemas.openxmlformats.org/drawingml/2006/main" r:embed="Rda719206fd5b4042">
             <a:alphaModFix amt="28000"/>
           </a:blip>
           <a:stretch xmlns:a="http://schemas.openxmlformats.org/drawingml/2006/main"/>
@@ -2875,7 +2875,7 @@
           <p:nvPr/>
         </p:nvPicPr>
         <p:blipFill rotWithShape="1">
-          <a:blip xmlns:r="http://schemas.openxmlformats.org/officeDocument/2006/relationships" xmlns:a="http://schemas.openxmlformats.org/drawingml/2006/main" r:embed="R45fa4f8ff20a442e">
+          <a:blip xmlns:r="http://schemas.openxmlformats.org/officeDocument/2006/relationships" xmlns:a="http://schemas.openxmlformats.org/drawingml/2006/main" r:embed="R50401dbc8c934db1">
             <a:alphaModFix amt="28000"/>
           </a:blip>
           <a:stretch xmlns:a="http://schemas.openxmlformats.org/drawingml/2006/main"/>
@@ -3016,7 +3016,7 @@
           <p:nvPr/>
         </p:nvPicPr>
         <p:blipFill rotWithShape="1">
-          <a:blip xmlns:r="http://schemas.openxmlformats.org/officeDocument/2006/relationships" xmlns:a="http://schemas.openxmlformats.org/drawingml/2006/main" r:embed="Rd25cf624c2324b21">
+          <a:blip xmlns:r="http://schemas.openxmlformats.org/officeDocument/2006/relationships" xmlns:a="http://schemas.openxmlformats.org/drawingml/2006/main" r:embed="Rb448823a00bf4cef">
             <a:alphaModFix amt="28000"/>
           </a:blip>
           <a:stretch xmlns:a="http://schemas.openxmlformats.org/drawingml/2006/main"/>
@@ -3130,7 +3130,7 @@
           <p:nvPr/>
         </p:nvPicPr>
         <p:blipFill rotWithShape="1">
-          <a:blip xmlns:r="http://schemas.openxmlformats.org/officeDocument/2006/relationships" xmlns:a="http://schemas.openxmlformats.org/drawingml/2006/main" r:embed="R2115cad081cd4168">
+          <a:blip xmlns:r="http://schemas.openxmlformats.org/officeDocument/2006/relationships" xmlns:a="http://schemas.openxmlformats.org/drawingml/2006/main" r:embed="R33b75da685654313">
             <a:alphaModFix amt="28000"/>
           </a:blip>
           <a:stretch xmlns:a="http://schemas.openxmlformats.org/drawingml/2006/main"/>
@@ -3457,7 +3457,7 @@
           <p:nvPr/>
         </p:nvPicPr>
         <p:blipFill rotWithShape="1">
-          <a:blip xmlns:r="http://schemas.openxmlformats.org/officeDocument/2006/relationships" xmlns:a="http://schemas.openxmlformats.org/drawingml/2006/main" r:embed="Rbc72c04481d24012">
+          <a:blip xmlns:r="http://schemas.openxmlformats.org/officeDocument/2006/relationships" xmlns:a="http://schemas.openxmlformats.org/drawingml/2006/main" r:embed="R840d9474f9c446da">
             <a:alphaModFix amt="28000"/>
           </a:blip>
           <a:stretch xmlns:a="http://schemas.openxmlformats.org/drawingml/2006/main"/>
@@ -3745,7 +3745,7 @@
           <p:nvPr/>
         </p:nvPicPr>
         <p:blipFill rotWithShape="1">
-          <a:blip xmlns:r="http://schemas.openxmlformats.org/officeDocument/2006/relationships" xmlns:a="http://schemas.openxmlformats.org/drawingml/2006/main" r:embed="R135ce3e256564b53">
+          <a:blip xmlns:r="http://schemas.openxmlformats.org/officeDocument/2006/relationships" xmlns:a="http://schemas.openxmlformats.org/drawingml/2006/main" r:embed="Rb66f01e2baf14538">
             <a:alphaModFix amt="28000"/>
           </a:blip>
           <a:stretch xmlns:a="http://schemas.openxmlformats.org/drawingml/2006/main"/>
@@ -3982,17 +3982,17 @@
   </p:cSld>
   <p:clrMap bg1="lt1" tx1="dk1" bg2="lt2" tx2="dk2" accent1="accent1" accent2="accent2" accent3="accent3" accent4="accent4" accent5="accent5" accent6="accent6" hlink="hlink" folHlink="folHlink"/>
   <p:sldLayoutIdLst>
-    <p:sldLayoutId xmlns:r="http://schemas.openxmlformats.org/officeDocument/2006/relationships" id="2147483649" r:id="Rd04ba1d8eb124579"/>
-    <p:sldLayoutId xmlns:r="http://schemas.openxmlformats.org/officeDocument/2006/relationships" id="2147483650" r:id="R156c27790a584853"/>
-    <p:sldLayoutId xmlns:r="http://schemas.openxmlformats.org/officeDocument/2006/relationships" id="2147483651" r:id="R0a00165a71784d5a"/>
-    <p:sldLayoutId xmlns:r="http://schemas.openxmlformats.org/officeDocument/2006/relationships" id="2147483652" r:id="Rd27b4d605ff544dd"/>
-    <p:sldLayoutId xmlns:r="http://schemas.openxmlformats.org/officeDocument/2006/relationships" id="2147483653" r:id="Rf6e1486245dd410f"/>
-    <p:sldLayoutId xmlns:r="http://schemas.openxmlformats.org/officeDocument/2006/relationships" id="2147483654" r:id="R4e8a974498fa47ee"/>
-    <p:sldLayoutId xmlns:r="http://schemas.openxmlformats.org/officeDocument/2006/relationships" id="2147483655" r:id="R8ae292caed6a4b23"/>
-    <p:sldLayoutId xmlns:r="http://schemas.openxmlformats.org/officeDocument/2006/relationships" id="2147483656" r:id="R2b8b4fb99ed542fa"/>
-    <p:sldLayoutId xmlns:r="http://schemas.openxmlformats.org/officeDocument/2006/relationships" id="2147483657" r:id="Rcfc57c4f7dab44c9"/>
-    <p:sldLayoutId xmlns:r="http://schemas.openxmlformats.org/officeDocument/2006/relationships" id="2147483658" r:id="R307aeba563fc43c1"/>
-    <p:sldLayoutId xmlns:r="http://schemas.openxmlformats.org/officeDocument/2006/relationships" id="2147483659" r:id="Rf46885684a3f4fb5"/>
+    <p:sldLayoutId xmlns:r="http://schemas.openxmlformats.org/officeDocument/2006/relationships" id="2147483649" r:id="R06956a1179b74dcd"/>
+    <p:sldLayoutId xmlns:r="http://schemas.openxmlformats.org/officeDocument/2006/relationships" id="2147483650" r:id="R34d3c8fe142f452d"/>
+    <p:sldLayoutId xmlns:r="http://schemas.openxmlformats.org/officeDocument/2006/relationships" id="2147483651" r:id="Ra58c203de2ad44b3"/>
+    <p:sldLayoutId xmlns:r="http://schemas.openxmlformats.org/officeDocument/2006/relationships" id="2147483652" r:id="R72a873fad488482b"/>
+    <p:sldLayoutId xmlns:r="http://schemas.openxmlformats.org/officeDocument/2006/relationships" id="2147483653" r:id="R53338048d6a6446e"/>
+    <p:sldLayoutId xmlns:r="http://schemas.openxmlformats.org/officeDocument/2006/relationships" id="2147483654" r:id="R93ea15e119d3405c"/>
+    <p:sldLayoutId xmlns:r="http://schemas.openxmlformats.org/officeDocument/2006/relationships" id="2147483655" r:id="Ra4d115c884f94985"/>
+    <p:sldLayoutId xmlns:r="http://schemas.openxmlformats.org/officeDocument/2006/relationships" id="2147483656" r:id="Rd3d655c23d514f78"/>
+    <p:sldLayoutId xmlns:r="http://schemas.openxmlformats.org/officeDocument/2006/relationships" id="2147483657" r:id="R3e33368b831b403f"/>
+    <p:sldLayoutId xmlns:r="http://schemas.openxmlformats.org/officeDocument/2006/relationships" id="2147483658" r:id="Rfbcf1886b3df4638"/>
+    <p:sldLayoutId xmlns:r="http://schemas.openxmlformats.org/officeDocument/2006/relationships" id="2147483659" r:id="R6166fc2c5e4645ab"/>
   </p:sldLayoutIdLst>
   <p:hf hdr="0" ftr="0" dt="0"/>
   <p:txStyles>

--- a/Mapped Curriculum Lessons/Grade 6/Lesson 04 - Decisions/Decisions - Slides.pptx
+++ b/Mapped Curriculum Lessons/Grade 6/Lesson 04 - Decisions/Decisions - Slides.pptx
@@ -2,28 +2,28 @@
 <file path=ppt/presentation.xml><?xml version="1.0" encoding="utf-8"?>
 <p:presentation xmlns:p="http://schemas.openxmlformats.org/presentationml/2006/main" embedTrueTypeFonts="1" saveSubsetFonts="0">
   <p:sldMasterIdLst>
-    <p:sldMasterId xmlns:r="http://schemas.openxmlformats.org/officeDocument/2006/relationships" id="2147483648" r:id="Rc1c548d078004890"/>
+    <p:sldMasterId xmlns:r="http://schemas.openxmlformats.org/officeDocument/2006/relationships" id="2147483648" r:id="R4bc30f27cce24734"/>
   </p:sldMasterIdLst>
   <p:notesMasterIdLst>
-    <p:notesMasterId xmlns:r="http://schemas.openxmlformats.org/officeDocument/2006/relationships" r:id="R4859f0e208574960"/>
+    <p:notesMasterId xmlns:r="http://schemas.openxmlformats.org/officeDocument/2006/relationships" r:id="R14bdb1abd5d14226"/>
   </p:notesMasterIdLst>
   <p:sldIdLst>
-    <p:sldId xmlns:r="http://schemas.openxmlformats.org/officeDocument/2006/relationships" id="256" r:id="Re32879e109204885"/>
-    <p:sldId xmlns:r="http://schemas.openxmlformats.org/officeDocument/2006/relationships" id="257" r:id="Reec4d9f66c654803"/>
-    <p:sldId xmlns:r="http://schemas.openxmlformats.org/officeDocument/2006/relationships" id="258" r:id="Rd7707083a23747a0"/>
-    <p:sldId xmlns:r="http://schemas.openxmlformats.org/officeDocument/2006/relationships" id="259" r:id="Rf4d355711e754358"/>
-    <p:sldId xmlns:r="http://schemas.openxmlformats.org/officeDocument/2006/relationships" id="260" r:id="Rc27dd664c8064118"/>
-    <p:sldId xmlns:r="http://schemas.openxmlformats.org/officeDocument/2006/relationships" id="261" r:id="Rdae52104226a43d8"/>
-    <p:sldId xmlns:r="http://schemas.openxmlformats.org/officeDocument/2006/relationships" id="262" r:id="Rb7001109c4894e02"/>
-    <p:sldId xmlns:r="http://schemas.openxmlformats.org/officeDocument/2006/relationships" id="263" r:id="R597927a8a9cf4891"/>
-    <p:sldId xmlns:r="http://schemas.openxmlformats.org/officeDocument/2006/relationships" id="264" r:id="Ree7d33caf15e49a5"/>
+    <p:sldId xmlns:r="http://schemas.openxmlformats.org/officeDocument/2006/relationships" id="256" r:id="Rfcf11cb2c2384da1"/>
+    <p:sldId xmlns:r="http://schemas.openxmlformats.org/officeDocument/2006/relationships" id="257" r:id="Rafefc96f5ec640c2"/>
+    <p:sldId xmlns:r="http://schemas.openxmlformats.org/officeDocument/2006/relationships" id="258" r:id="R8b6927b9d504445c"/>
+    <p:sldId xmlns:r="http://schemas.openxmlformats.org/officeDocument/2006/relationships" id="259" r:id="Re75d8d63787d46e3"/>
+    <p:sldId xmlns:r="http://schemas.openxmlformats.org/officeDocument/2006/relationships" id="260" r:id="Rb9833b45e4cf4213"/>
+    <p:sldId xmlns:r="http://schemas.openxmlformats.org/officeDocument/2006/relationships" id="261" r:id="Rcdd81b798a304d31"/>
+    <p:sldId xmlns:r="http://schemas.openxmlformats.org/officeDocument/2006/relationships" id="262" r:id="R749025031ab84952"/>
+    <p:sldId xmlns:r="http://schemas.openxmlformats.org/officeDocument/2006/relationships" id="263" r:id="R8ba6f59c5d5f409f"/>
+    <p:sldId xmlns:r="http://schemas.openxmlformats.org/officeDocument/2006/relationships" id="264" r:id="R47bfde2783964886"/>
   </p:sldIdLst>
   <p:sldSz cx="12192000" cy="6858000"/>
   <p:notesSz cx="6858000" cy="9144000"/>
   <p:embeddedFontLst>
     <p:embeddedFont>
       <p:font typeface="JetBrains Mono"/>
-      <p:regular xmlns:r="http://schemas.openxmlformats.org/officeDocument/2006/relationships" r:id="Rdee370abf5e341b1"/>
+      <p:regular xmlns:r="http://schemas.openxmlformats.org/officeDocument/2006/relationships" r:id="R379b841eb6cf4ef5"/>
     </p:embeddedFont>
   </p:embeddedFontLst>
 </p:presentation>
@@ -1071,7 +1071,7 @@
           <p:nvPr/>
         </p:nvPicPr>
         <p:blipFill rotWithShape="1">
-          <a:blip xmlns:r="http://schemas.openxmlformats.org/officeDocument/2006/relationships" xmlns:a="http://schemas.openxmlformats.org/drawingml/2006/main" r:embed="R517fc03637654012"/>
+          <a:blip xmlns:r="http://schemas.openxmlformats.org/officeDocument/2006/relationships" xmlns:a="http://schemas.openxmlformats.org/drawingml/2006/main" r:embed="R06d7ed5f8063440c"/>
           <a:stretch xmlns:a="http://schemas.openxmlformats.org/drawingml/2006/main"/>
         </p:blipFill>
         <p:spPr>
@@ -1451,7 +1451,7 @@
           <p:nvPr/>
         </p:nvPicPr>
         <p:blipFill rotWithShape="1">
-          <a:blip xmlns:r="http://schemas.openxmlformats.org/officeDocument/2006/relationships" xmlns:a="http://schemas.openxmlformats.org/drawingml/2006/main" r:embed="Rcabd9d0b45464d5d">
+          <a:blip xmlns:r="http://schemas.openxmlformats.org/officeDocument/2006/relationships" xmlns:a="http://schemas.openxmlformats.org/drawingml/2006/main" r:embed="R1b7cc8e220024042">
             <a:alphaModFix amt="28000"/>
           </a:blip>
           <a:stretch xmlns:a="http://schemas.openxmlformats.org/drawingml/2006/main"/>
@@ -1664,7 +1664,7 @@
           <p:nvPr/>
         </p:nvPicPr>
         <p:blipFill rotWithShape="1">
-          <a:blip xmlns:r="http://schemas.openxmlformats.org/officeDocument/2006/relationships" xmlns:a="http://schemas.openxmlformats.org/drawingml/2006/main" r:embed="R014b29c3dd6d439d">
+          <a:blip xmlns:r="http://schemas.openxmlformats.org/officeDocument/2006/relationships" xmlns:a="http://schemas.openxmlformats.org/drawingml/2006/main" r:embed="R73665283da9f4089">
             <a:alphaModFix amt="28000"/>
           </a:blip>
           <a:stretch xmlns:a="http://schemas.openxmlformats.org/drawingml/2006/main"/>
@@ -1899,7 +1899,7 @@
           <p:nvPr/>
         </p:nvPicPr>
         <p:blipFill rotWithShape="1">
-          <a:blip xmlns:r="http://schemas.openxmlformats.org/officeDocument/2006/relationships" xmlns:a="http://schemas.openxmlformats.org/drawingml/2006/main" r:embed="R0765d3d37c394226">
+          <a:blip xmlns:r="http://schemas.openxmlformats.org/officeDocument/2006/relationships" xmlns:a="http://schemas.openxmlformats.org/drawingml/2006/main" r:embed="R91f71ba64aaf4594">
             <a:alphaModFix amt="28000"/>
           </a:blip>
           <a:stretch xmlns:a="http://schemas.openxmlformats.org/drawingml/2006/main"/>
@@ -2176,7 +2176,7 @@
           <p:nvPr/>
         </p:nvPicPr>
         <p:blipFill rotWithShape="1">
-          <a:blip xmlns:r="http://schemas.openxmlformats.org/officeDocument/2006/relationships" xmlns:a="http://schemas.openxmlformats.org/drawingml/2006/main" r:embed="R85d1b514d1ce4207">
+          <a:blip xmlns:r="http://schemas.openxmlformats.org/officeDocument/2006/relationships" xmlns:a="http://schemas.openxmlformats.org/drawingml/2006/main" r:embed="R0d22803f0f1a4f04">
             <a:alphaModFix amt="28000"/>
           </a:blip>
           <a:stretch xmlns:a="http://schemas.openxmlformats.org/drawingml/2006/main"/>
@@ -2451,7 +2451,7 @@
           <p:nvPr/>
         </p:nvPicPr>
         <p:blipFill rotWithShape="1">
-          <a:blip xmlns:r="http://schemas.openxmlformats.org/officeDocument/2006/relationships" xmlns:a="http://schemas.openxmlformats.org/drawingml/2006/main" r:embed="Rda719206fd5b4042">
+          <a:blip xmlns:r="http://schemas.openxmlformats.org/officeDocument/2006/relationships" xmlns:a="http://schemas.openxmlformats.org/drawingml/2006/main" r:embed="R3ea8ce5f88664e71">
             <a:alphaModFix amt="28000"/>
           </a:blip>
           <a:stretch xmlns:a="http://schemas.openxmlformats.org/drawingml/2006/main"/>
@@ -2875,7 +2875,7 @@
           <p:nvPr/>
         </p:nvPicPr>
         <p:blipFill rotWithShape="1">
-          <a:blip xmlns:r="http://schemas.openxmlformats.org/officeDocument/2006/relationships" xmlns:a="http://schemas.openxmlformats.org/drawingml/2006/main" r:embed="R50401dbc8c934db1">
+          <a:blip xmlns:r="http://schemas.openxmlformats.org/officeDocument/2006/relationships" xmlns:a="http://schemas.openxmlformats.org/drawingml/2006/main" r:embed="R178d8459b3d146b9">
             <a:alphaModFix amt="28000"/>
           </a:blip>
           <a:stretch xmlns:a="http://schemas.openxmlformats.org/drawingml/2006/main"/>
@@ -3016,7 +3016,7 @@
           <p:nvPr/>
         </p:nvPicPr>
         <p:blipFill rotWithShape="1">
-          <a:blip xmlns:r="http://schemas.openxmlformats.org/officeDocument/2006/relationships" xmlns:a="http://schemas.openxmlformats.org/drawingml/2006/main" r:embed="Rb448823a00bf4cef">
+          <a:blip xmlns:r="http://schemas.openxmlformats.org/officeDocument/2006/relationships" xmlns:a="http://schemas.openxmlformats.org/drawingml/2006/main" r:embed="R1451f5bfc48a4d3c">
             <a:alphaModFix amt="28000"/>
           </a:blip>
           <a:stretch xmlns:a="http://schemas.openxmlformats.org/drawingml/2006/main"/>
@@ -3130,7 +3130,7 @@
           <p:nvPr/>
         </p:nvPicPr>
         <p:blipFill rotWithShape="1">
-          <a:blip xmlns:r="http://schemas.openxmlformats.org/officeDocument/2006/relationships" xmlns:a="http://schemas.openxmlformats.org/drawingml/2006/main" r:embed="R33b75da685654313">
+          <a:blip xmlns:r="http://schemas.openxmlformats.org/officeDocument/2006/relationships" xmlns:a="http://schemas.openxmlformats.org/drawingml/2006/main" r:embed="R52fa6fac753741c2">
             <a:alphaModFix amt="28000"/>
           </a:blip>
           <a:stretch xmlns:a="http://schemas.openxmlformats.org/drawingml/2006/main"/>
@@ -3457,7 +3457,7 @@
           <p:nvPr/>
         </p:nvPicPr>
         <p:blipFill rotWithShape="1">
-          <a:blip xmlns:r="http://schemas.openxmlformats.org/officeDocument/2006/relationships" xmlns:a="http://schemas.openxmlformats.org/drawingml/2006/main" r:embed="R840d9474f9c446da">
+          <a:blip xmlns:r="http://schemas.openxmlformats.org/officeDocument/2006/relationships" xmlns:a="http://schemas.openxmlformats.org/drawingml/2006/main" r:embed="R60724b6f3a064e48">
             <a:alphaModFix amt="28000"/>
           </a:blip>
           <a:stretch xmlns:a="http://schemas.openxmlformats.org/drawingml/2006/main"/>
@@ -3745,7 +3745,7 @@
           <p:nvPr/>
         </p:nvPicPr>
         <p:blipFill rotWithShape="1">
-          <a:blip xmlns:r="http://schemas.openxmlformats.org/officeDocument/2006/relationships" xmlns:a="http://schemas.openxmlformats.org/drawingml/2006/main" r:embed="Rb66f01e2baf14538">
+          <a:blip xmlns:r="http://schemas.openxmlformats.org/officeDocument/2006/relationships" xmlns:a="http://schemas.openxmlformats.org/drawingml/2006/main" r:embed="Rb29d125846564b5a">
             <a:alphaModFix amt="28000"/>
           </a:blip>
           <a:stretch xmlns:a="http://schemas.openxmlformats.org/drawingml/2006/main"/>
@@ -3982,17 +3982,17 @@
   </p:cSld>
   <p:clrMap bg1="lt1" tx1="dk1" bg2="lt2" tx2="dk2" accent1="accent1" accent2="accent2" accent3="accent3" accent4="accent4" accent5="accent5" accent6="accent6" hlink="hlink" folHlink="folHlink"/>
   <p:sldLayoutIdLst>
-    <p:sldLayoutId xmlns:r="http://schemas.openxmlformats.org/officeDocument/2006/relationships" id="2147483649" r:id="R06956a1179b74dcd"/>
-    <p:sldLayoutId xmlns:r="http://schemas.openxmlformats.org/officeDocument/2006/relationships" id="2147483650" r:id="R34d3c8fe142f452d"/>
-    <p:sldLayoutId xmlns:r="http://schemas.openxmlformats.org/officeDocument/2006/relationships" id="2147483651" r:id="Ra58c203de2ad44b3"/>
-    <p:sldLayoutId xmlns:r="http://schemas.openxmlformats.org/officeDocument/2006/relationships" id="2147483652" r:id="R72a873fad488482b"/>
-    <p:sldLayoutId xmlns:r="http://schemas.openxmlformats.org/officeDocument/2006/relationships" id="2147483653" r:id="R53338048d6a6446e"/>
-    <p:sldLayoutId xmlns:r="http://schemas.openxmlformats.org/officeDocument/2006/relationships" id="2147483654" r:id="R93ea15e119d3405c"/>
-    <p:sldLayoutId xmlns:r="http://schemas.openxmlformats.org/officeDocument/2006/relationships" id="2147483655" r:id="Ra4d115c884f94985"/>
-    <p:sldLayoutId xmlns:r="http://schemas.openxmlformats.org/officeDocument/2006/relationships" id="2147483656" r:id="Rd3d655c23d514f78"/>
-    <p:sldLayoutId xmlns:r="http://schemas.openxmlformats.org/officeDocument/2006/relationships" id="2147483657" r:id="R3e33368b831b403f"/>
-    <p:sldLayoutId xmlns:r="http://schemas.openxmlformats.org/officeDocument/2006/relationships" id="2147483658" r:id="Rfbcf1886b3df4638"/>
-    <p:sldLayoutId xmlns:r="http://schemas.openxmlformats.org/officeDocument/2006/relationships" id="2147483659" r:id="R6166fc2c5e4645ab"/>
+    <p:sldLayoutId xmlns:r="http://schemas.openxmlformats.org/officeDocument/2006/relationships" id="2147483649" r:id="R6cd422fcec3e43ed"/>
+    <p:sldLayoutId xmlns:r="http://schemas.openxmlformats.org/officeDocument/2006/relationships" id="2147483650" r:id="R267ffb63c5fa4ebe"/>
+    <p:sldLayoutId xmlns:r="http://schemas.openxmlformats.org/officeDocument/2006/relationships" id="2147483651" r:id="R5c9fb18c72744651"/>
+    <p:sldLayoutId xmlns:r="http://schemas.openxmlformats.org/officeDocument/2006/relationships" id="2147483652" r:id="R4d7e12e6067c48e3"/>
+    <p:sldLayoutId xmlns:r="http://schemas.openxmlformats.org/officeDocument/2006/relationships" id="2147483653" r:id="R0c82dd32e1024733"/>
+    <p:sldLayoutId xmlns:r="http://schemas.openxmlformats.org/officeDocument/2006/relationships" id="2147483654" r:id="Rbdae871291114e31"/>
+    <p:sldLayoutId xmlns:r="http://schemas.openxmlformats.org/officeDocument/2006/relationships" id="2147483655" r:id="Rd1d7d8885f4c4b86"/>
+    <p:sldLayoutId xmlns:r="http://schemas.openxmlformats.org/officeDocument/2006/relationships" id="2147483656" r:id="Rec8f67dd17fb458b"/>
+    <p:sldLayoutId xmlns:r="http://schemas.openxmlformats.org/officeDocument/2006/relationships" id="2147483657" r:id="Re289b532a08a4419"/>
+    <p:sldLayoutId xmlns:r="http://schemas.openxmlformats.org/officeDocument/2006/relationships" id="2147483658" r:id="R89c069b6df834393"/>
+    <p:sldLayoutId xmlns:r="http://schemas.openxmlformats.org/officeDocument/2006/relationships" id="2147483659" r:id="R82c7683eb3f049be"/>
   </p:sldLayoutIdLst>
   <p:hf hdr="0" ftr="0" dt="0"/>
   <p:txStyles>
@@ -4994,24 +4994,13 @@
             <a:r>
               <a:rPr sz="2400">
                 <a:solidFill>
-                  <a:srgbClr val="080808"/>
-                </a:solidFill>
-                <a:latin typeface="JetBrains Mono"/>
-                <a:ea typeface="JetBrains Mono"/>
-                <a:cs typeface="JetBrains Mono"/>
-              </a:rPr>
-              <a:t> </a:t>
-            </a:r>
-            <a:r>
-              <a:rPr sz="2400">
-                <a:solidFill>
                   <a:srgbClr val="067D17"/>
                 </a:solidFill>
                 <a:latin typeface="JetBrains Mono"/>
                 <a:ea typeface="JetBrains Mono"/>
                 <a:cs typeface="JetBrains Mono"/>
               </a:rPr>
-              <a:t>"walk"</a:t>
+              <a:t> "walk"</a:t>
             </a:r>
             <a:r>
               <a:rPr sz="2400">
@@ -5035,24 +5024,13 @@
             <a:r>
               <a:rPr sz="2400">
                 <a:solidFill>
-                  <a:srgbClr val="080808"/>
-                </a:solidFill>
-                <a:latin typeface="JetBrains Mono"/>
-                <a:ea typeface="JetBrains Mono"/>
-                <a:cs typeface="JetBrains Mono"/>
-              </a:rPr>
-              <a:t>    </a:t>
-            </a:r>
-            <a:r>
-              <a:rPr sz="2400">
-                <a:solidFill>
                   <a:srgbClr val="1750EB"/>
                 </a:solidFill>
                 <a:latin typeface="JetBrains Mono"/>
                 <a:ea typeface="JetBrains Mono"/>
                 <a:cs typeface="JetBrains Mono"/>
               </a:rPr>
-              <a:t>print</a:t>
+              <a:t>    print</a:t>
             </a:r>
             <a:r>
               <a:rPr sz="2400">
@@ -5128,24 +5106,13 @@
             <a:r>
               <a:rPr sz="2400">
                 <a:solidFill>
-                  <a:srgbClr val="080808"/>
-                </a:solidFill>
-                <a:latin typeface="JetBrains Mono"/>
-                <a:ea typeface="JetBrains Mono"/>
-                <a:cs typeface="JetBrains Mono"/>
-              </a:rPr>
-              <a:t>    </a:t>
-            </a:r>
-            <a:r>
-              <a:rPr sz="2400">
-                <a:solidFill>
                   <a:srgbClr val="1750EB"/>
                 </a:solidFill>
                 <a:latin typeface="JetBrains Mono"/>
                 <a:ea typeface="JetBrains Mono"/>
                 <a:cs typeface="JetBrains Mono"/>
               </a:rPr>
-              <a:t>print</a:t>
+              <a:t>    print</a:t>
             </a:r>
             <a:r>
               <a:rPr sz="2400">
@@ -5564,24 +5531,13 @@
             <a:r>
               <a:rPr sz="2400">
                 <a:solidFill>
-                  <a:srgbClr val="080808"/>
-                </a:solidFill>
-                <a:latin typeface="JetBrains Mono"/>
-                <a:ea typeface="JetBrains Mono"/>
-                <a:cs typeface="JetBrains Mono"/>
-              </a:rPr>
-              <a:t> </a:t>
-            </a:r>
-            <a:r>
-              <a:rPr sz="2400">
-                <a:solidFill>
                   <a:srgbClr val="067D17"/>
                 </a:solidFill>
                 <a:latin typeface="JetBrains Mono"/>
                 <a:ea typeface="JetBrains Mono"/>
                 <a:cs typeface="JetBrains Mono"/>
               </a:rPr>
-              <a:t>"walk"</a:t>
+              <a:t> "walk"</a:t>
             </a:r>
             <a:r>
               <a:rPr sz="2400">
@@ -5605,24 +5561,13 @@
             <a:r>
               <a:rPr sz="2400">
                 <a:solidFill>
-                  <a:srgbClr val="080808"/>
-                </a:solidFill>
-                <a:latin typeface="JetBrains Mono"/>
-                <a:ea typeface="JetBrains Mono"/>
-                <a:cs typeface="JetBrains Mono"/>
-              </a:rPr>
-              <a:t>    </a:t>
-            </a:r>
-            <a:r>
-              <a:rPr sz="2400">
-                <a:solidFill>
                   <a:srgbClr val="1750EB"/>
                 </a:solidFill>
                 <a:latin typeface="JetBrains Mono"/>
                 <a:ea typeface="JetBrains Mono"/>
                 <a:cs typeface="JetBrains Mono"/>
               </a:rPr>
-              <a:t>print</a:t>
+              <a:t>    print</a:t>
             </a:r>
             <a:r>
               <a:rPr sz="2400">
@@ -5698,24 +5643,13 @@
             <a:r>
               <a:rPr sz="2400">
                 <a:solidFill>
-                  <a:srgbClr val="080808"/>
-                </a:solidFill>
-                <a:latin typeface="JetBrains Mono"/>
-                <a:ea typeface="JetBrains Mono"/>
-                <a:cs typeface="JetBrains Mono"/>
-              </a:rPr>
-              <a:t>    </a:t>
-            </a:r>
-            <a:r>
-              <a:rPr sz="2400">
-                <a:solidFill>
                   <a:srgbClr val="1750EB"/>
                 </a:solidFill>
                 <a:latin typeface="JetBrains Mono"/>
                 <a:ea typeface="JetBrains Mono"/>
                 <a:cs typeface="JetBrains Mono"/>
               </a:rPr>
-              <a:t>print</a:t>
+              <a:t>    print</a:t>
             </a:r>
             <a:r>
               <a:rPr sz="2400">
@@ -6134,24 +6068,13 @@
             <a:r>
               <a:rPr sz="2400">
                 <a:solidFill>
-                  <a:srgbClr val="080808"/>
-                </a:solidFill>
-                <a:latin typeface="JetBrains Mono"/>
-                <a:ea typeface="JetBrains Mono"/>
-                <a:cs typeface="JetBrains Mono"/>
-              </a:rPr>
-              <a:t> </a:t>
-            </a:r>
-            <a:r>
-              <a:rPr sz="2400">
-                <a:solidFill>
                   <a:srgbClr val="067D17"/>
                 </a:solidFill>
                 <a:latin typeface="JetBrains Mono"/>
                 <a:ea typeface="JetBrains Mono"/>
                 <a:cs typeface="JetBrains Mono"/>
               </a:rPr>
-              <a:t>"walk"</a:t>
+              <a:t> "walk"</a:t>
             </a:r>
             <a:r>
               <a:rPr sz="2400">
@@ -6175,24 +6098,13 @@
             <a:r>
               <a:rPr sz="2400">
                 <a:solidFill>
-                  <a:srgbClr val="080808"/>
-                </a:solidFill>
-                <a:latin typeface="JetBrains Mono"/>
-                <a:ea typeface="JetBrains Mono"/>
-                <a:cs typeface="JetBrains Mono"/>
-              </a:rPr>
-              <a:t>    </a:t>
-            </a:r>
-            <a:r>
-              <a:rPr sz="2400">
-                <a:solidFill>
                   <a:srgbClr val="1750EB"/>
                 </a:solidFill>
                 <a:latin typeface="JetBrains Mono"/>
                 <a:ea typeface="JetBrains Mono"/>
                 <a:cs typeface="JetBrains Mono"/>
               </a:rPr>
-              <a:t>print</a:t>
+              <a:t>    print</a:t>
             </a:r>
             <a:r>
               <a:rPr sz="2400">
@@ -6268,24 +6180,13 @@
             <a:r>
               <a:rPr sz="2400">
                 <a:solidFill>
-                  <a:srgbClr val="080808"/>
-                </a:solidFill>
-                <a:latin typeface="JetBrains Mono"/>
-                <a:ea typeface="JetBrains Mono"/>
-                <a:cs typeface="JetBrains Mono"/>
-              </a:rPr>
-              <a:t>    </a:t>
-            </a:r>
-            <a:r>
-              <a:rPr sz="2400">
-                <a:solidFill>
                   <a:srgbClr val="1750EB"/>
                 </a:solidFill>
                 <a:latin typeface="JetBrains Mono"/>
                 <a:ea typeface="JetBrains Mono"/>
                 <a:cs typeface="JetBrains Mono"/>
               </a:rPr>
-              <a:t>print</a:t>
+              <a:t>    print</a:t>
             </a:r>
             <a:r>
               <a:rPr sz="2400">
@@ -6957,24 +6858,13 @@
             <a:r>
               <a:rPr sz="1600">
                 <a:solidFill>
-                  <a:srgbClr val="080808"/>
-                </a:solidFill>
-                <a:latin typeface="JetBrains Mono"/>
-                <a:ea typeface="JetBrains Mono"/>
-                <a:cs typeface="JetBrains Mono"/>
-              </a:rPr>
-              <a:t> </a:t>
-            </a:r>
-            <a:r>
-              <a:rPr sz="1600">
-                <a:solidFill>
                   <a:srgbClr val="067D17"/>
                 </a:solidFill>
                 <a:latin typeface="JetBrains Mono"/>
                 <a:ea typeface="JetBrains Mono"/>
                 <a:cs typeface="JetBrains Mono"/>
               </a:rPr>
-              <a:t>"walk"</a:t>
+              <a:t> "walk"</a:t>
             </a:r>
             <a:r>
               <a:rPr sz="1600">
@@ -7000,24 +6890,13 @@
             <a:r>
               <a:rPr sz="1600">
                 <a:solidFill>
-                  <a:srgbClr val="080808"/>
-                </a:solidFill>
-                <a:latin typeface="JetBrains Mono"/>
-                <a:ea typeface="JetBrains Mono"/>
-                <a:cs typeface="JetBrains Mono"/>
-              </a:rPr>
-              <a:t>    </a:t>
-            </a:r>
-            <a:r>
-              <a:rPr sz="1600">
-                <a:solidFill>
                   <a:srgbClr val="1750EB"/>
                 </a:solidFill>
                 <a:latin typeface="JetBrains Mono"/>
                 <a:ea typeface="JetBrains Mono"/>
                 <a:cs typeface="JetBrains Mono"/>
               </a:rPr>
-              <a:t>print</a:t>
+              <a:t>    print</a:t>
             </a:r>
             <a:r>
               <a:rPr sz="1600">
@@ -7097,24 +6976,13 @@
             <a:r>
               <a:rPr sz="1600">
                 <a:solidFill>
-                  <a:srgbClr val="080808"/>
-                </a:solidFill>
-                <a:latin typeface="JetBrains Mono"/>
-                <a:ea typeface="JetBrains Mono"/>
-                <a:cs typeface="JetBrains Mono"/>
-              </a:rPr>
-              <a:t>    </a:t>
-            </a:r>
-            <a:r>
-              <a:rPr sz="1600">
-                <a:solidFill>
                   <a:srgbClr val="1750EB"/>
                 </a:solidFill>
                 <a:latin typeface="JetBrains Mono"/>
                 <a:ea typeface="JetBrains Mono"/>
                 <a:cs typeface="JetBrains Mono"/>
               </a:rPr>
-              <a:t>print</a:t>
+              <a:t>    print</a:t>
             </a:r>
             <a:r>
               <a:rPr sz="1600">
@@ -7735,24 +7603,13 @@
             <a:r>
               <a:rPr sz="1600">
                 <a:solidFill>
-                  <a:srgbClr val="080808"/>
-                </a:solidFill>
-                <a:latin typeface="JetBrains Mono"/>
-                <a:ea typeface="JetBrains Mono"/>
-                <a:cs typeface="JetBrains Mono"/>
-              </a:rPr>
-              <a:t> </a:t>
-            </a:r>
-            <a:r>
-              <a:rPr sz="1600">
-                <a:solidFill>
                   <a:srgbClr val="067D17"/>
                 </a:solidFill>
                 <a:latin typeface="JetBrains Mono"/>
                 <a:ea typeface="JetBrains Mono"/>
                 <a:cs typeface="JetBrains Mono"/>
               </a:rPr>
-              <a:t>"walk"</a:t>
+              <a:t> "walk"</a:t>
             </a:r>
             <a:r>
               <a:rPr sz="1600">
@@ -7778,24 +7635,13 @@
             <a:r>
               <a:rPr sz="1600">
                 <a:solidFill>
-                  <a:srgbClr val="080808"/>
-                </a:solidFill>
-                <a:latin typeface="JetBrains Mono"/>
-                <a:ea typeface="JetBrains Mono"/>
-                <a:cs typeface="JetBrains Mono"/>
-              </a:rPr>
-              <a:t>    </a:t>
-            </a:r>
-            <a:r>
-              <a:rPr sz="1600">
-                <a:solidFill>
                   <a:srgbClr val="1750EB"/>
                 </a:solidFill>
                 <a:latin typeface="JetBrains Mono"/>
                 <a:ea typeface="JetBrains Mono"/>
                 <a:cs typeface="JetBrains Mono"/>
               </a:rPr>
-              <a:t>print</a:t>
+              <a:t>    print</a:t>
             </a:r>
             <a:r>
               <a:rPr sz="1600">
@@ -7875,24 +7721,13 @@
             <a:r>
               <a:rPr sz="1600">
                 <a:solidFill>
-                  <a:srgbClr val="080808"/>
-                </a:solidFill>
-                <a:latin typeface="JetBrains Mono"/>
-                <a:ea typeface="JetBrains Mono"/>
-                <a:cs typeface="JetBrains Mono"/>
-              </a:rPr>
-              <a:t>    </a:t>
-            </a:r>
-            <a:r>
-              <a:rPr sz="1600">
-                <a:solidFill>
                   <a:srgbClr val="1750EB"/>
                 </a:solidFill>
                 <a:latin typeface="JetBrains Mono"/>
                 <a:ea typeface="JetBrains Mono"/>
                 <a:cs typeface="JetBrains Mono"/>
               </a:rPr>
-              <a:t>print</a:t>
+              <a:t>    print</a:t>
             </a:r>
             <a:r>
               <a:rPr sz="1600">
@@ -8508,24 +8343,13 @@
             <a:r>
               <a:rPr sz="1600">
                 <a:solidFill>
-                  <a:srgbClr val="080808"/>
-                </a:solidFill>
-                <a:latin typeface="JetBrains Mono"/>
-                <a:ea typeface="JetBrains Mono"/>
-                <a:cs typeface="JetBrains Mono"/>
-              </a:rPr>
-              <a:t> </a:t>
-            </a:r>
-            <a:r>
-              <a:rPr sz="1600">
-                <a:solidFill>
                   <a:srgbClr val="067D17"/>
                 </a:solidFill>
                 <a:latin typeface="JetBrains Mono"/>
                 <a:ea typeface="JetBrains Mono"/>
                 <a:cs typeface="JetBrains Mono"/>
               </a:rPr>
-              <a:t>"walk"</a:t>
+              <a:t> "walk"</a:t>
             </a:r>
             <a:r>
               <a:rPr sz="1600">
@@ -8551,24 +8375,13 @@
             <a:r>
               <a:rPr sz="1600">
                 <a:solidFill>
-                  <a:srgbClr val="080808"/>
-                </a:solidFill>
-                <a:latin typeface="JetBrains Mono"/>
-                <a:ea typeface="JetBrains Mono"/>
-                <a:cs typeface="JetBrains Mono"/>
-              </a:rPr>
-              <a:t>    </a:t>
-            </a:r>
-            <a:r>
-              <a:rPr sz="1600">
-                <a:solidFill>
                   <a:srgbClr val="1750EB"/>
                 </a:solidFill>
                 <a:latin typeface="JetBrains Mono"/>
                 <a:ea typeface="JetBrains Mono"/>
                 <a:cs typeface="JetBrains Mono"/>
               </a:rPr>
-              <a:t>print</a:t>
+              <a:t>    print</a:t>
             </a:r>
             <a:r>
               <a:rPr sz="1600">
@@ -8648,24 +8461,13 @@
             <a:r>
               <a:rPr sz="1600">
                 <a:solidFill>
-                  <a:srgbClr val="080808"/>
-                </a:solidFill>
-                <a:latin typeface="JetBrains Mono"/>
-                <a:ea typeface="JetBrains Mono"/>
-                <a:cs typeface="JetBrains Mono"/>
-              </a:rPr>
-              <a:t>    </a:t>
-            </a:r>
-            <a:r>
-              <a:rPr sz="1600">
-                <a:solidFill>
                   <a:srgbClr val="1750EB"/>
                 </a:solidFill>
                 <a:latin typeface="JetBrains Mono"/>
                 <a:ea typeface="JetBrains Mono"/>
                 <a:cs typeface="JetBrains Mono"/>
               </a:rPr>
-              <a:t>print</a:t>
+              <a:t>    print</a:t>
             </a:r>
             <a:r>
               <a:rPr sz="1600">
@@ -9281,24 +9083,13 @@
             <a:r>
               <a:rPr sz="1600">
                 <a:solidFill>
-                  <a:srgbClr val="080808"/>
-                </a:solidFill>
-                <a:latin typeface="JetBrains Mono"/>
-                <a:ea typeface="JetBrains Mono"/>
-                <a:cs typeface="JetBrains Mono"/>
-              </a:rPr>
-              <a:t> </a:t>
-            </a:r>
-            <a:r>
-              <a:rPr sz="1600">
-                <a:solidFill>
                   <a:srgbClr val="067D17"/>
                 </a:solidFill>
                 <a:latin typeface="JetBrains Mono"/>
                 <a:ea typeface="JetBrains Mono"/>
                 <a:cs typeface="JetBrains Mono"/>
               </a:rPr>
-              <a:t>"walk"</a:t>
+              <a:t> "walk"</a:t>
             </a:r>
             <a:r>
               <a:rPr sz="1600">
@@ -9324,24 +9115,13 @@
             <a:r>
               <a:rPr sz="1600">
                 <a:solidFill>
-                  <a:srgbClr val="080808"/>
-                </a:solidFill>
-                <a:latin typeface="JetBrains Mono"/>
-                <a:ea typeface="JetBrains Mono"/>
-                <a:cs typeface="JetBrains Mono"/>
-              </a:rPr>
-              <a:t>    </a:t>
-            </a:r>
-            <a:r>
-              <a:rPr sz="1600">
-                <a:solidFill>
                   <a:srgbClr val="1750EB"/>
                 </a:solidFill>
                 <a:latin typeface="JetBrains Mono"/>
                 <a:ea typeface="JetBrains Mono"/>
                 <a:cs typeface="JetBrains Mono"/>
               </a:rPr>
-              <a:t>print</a:t>
+              <a:t>    print</a:t>
             </a:r>
             <a:r>
               <a:rPr sz="1600">
@@ -9421,24 +9201,13 @@
             <a:r>
               <a:rPr sz="1600">
                 <a:solidFill>
-                  <a:srgbClr val="080808"/>
-                </a:solidFill>
-                <a:latin typeface="JetBrains Mono"/>
-                <a:ea typeface="JetBrains Mono"/>
-                <a:cs typeface="JetBrains Mono"/>
-              </a:rPr>
-              <a:t>    </a:t>
-            </a:r>
-            <a:r>
-              <a:rPr sz="1600">
-                <a:solidFill>
                   <a:srgbClr val="1750EB"/>
                 </a:solidFill>
                 <a:latin typeface="JetBrains Mono"/>
                 <a:ea typeface="JetBrains Mono"/>
                 <a:cs typeface="JetBrains Mono"/>
               </a:rPr>
-              <a:t>print</a:t>
+              <a:t>    print</a:t>
             </a:r>
             <a:r>
               <a:rPr sz="1600">
@@ -9705,24 +9474,13 @@
             <a:r>
               <a:rPr sz="1800">
                 <a:solidFill>
-                  <a:srgbClr val="080808"/>
-                </a:solidFill>
-                <a:latin typeface="JetBrains Mono"/>
-                <a:ea typeface="JetBrains Mono"/>
-                <a:cs typeface="JetBrains Mono"/>
-              </a:rPr>
-              <a:t> </a:t>
-            </a:r>
-            <a:r>
-              <a:rPr sz="1800">
-                <a:solidFill>
                   <a:srgbClr val="067D17"/>
                 </a:solidFill>
                 <a:latin typeface="JetBrains Mono"/>
                 <a:ea typeface="JetBrains Mono"/>
                 <a:cs typeface="JetBrains Mono"/>
               </a:rPr>
-              <a:t>"walk"</a:t>
+              <a:t> "walk"</a:t>
             </a:r>
             <a:r>
               <a:rPr sz="1800">
@@ -9746,24 +9504,13 @@
             <a:r>
               <a:rPr sz="1800">
                 <a:solidFill>
-                  <a:srgbClr val="080808"/>
-                </a:solidFill>
-                <a:latin typeface="JetBrains Mono"/>
-                <a:ea typeface="JetBrains Mono"/>
-                <a:cs typeface="JetBrains Mono"/>
-              </a:rPr>
-              <a:t>    </a:t>
-            </a:r>
-            <a:r>
-              <a:rPr sz="1800">
-                <a:solidFill>
                   <a:srgbClr val="1750EB"/>
                 </a:solidFill>
                 <a:latin typeface="JetBrains Mono"/>
                 <a:ea typeface="JetBrains Mono"/>
                 <a:cs typeface="JetBrains Mono"/>
               </a:rPr>
-              <a:t>print</a:t>
+              <a:t>    print</a:t>
             </a:r>
             <a:r>
               <a:rPr sz="1800">
@@ -9839,24 +9586,13 @@
             <a:r>
               <a:rPr sz="1800">
                 <a:solidFill>
-                  <a:srgbClr val="080808"/>
-                </a:solidFill>
-                <a:latin typeface="JetBrains Mono"/>
-                <a:ea typeface="JetBrains Mono"/>
-                <a:cs typeface="JetBrains Mono"/>
-              </a:rPr>
-              <a:t>    </a:t>
-            </a:r>
-            <a:r>
-              <a:rPr sz="1800">
-                <a:solidFill>
                   <a:srgbClr val="1750EB"/>
                 </a:solidFill>
                 <a:latin typeface="JetBrains Mono"/>
                 <a:ea typeface="JetBrains Mono"/>
                 <a:cs typeface="JetBrains Mono"/>
               </a:rPr>
-              <a:t>print</a:t>
+              <a:t>    print</a:t>
             </a:r>
             <a:r>
               <a:rPr sz="1800">
